--- a/1차 프로젝트/1. 기획서.pptx
+++ b/1차 프로젝트/1. 기획서.pptx
@@ -5,10 +5,10 @@
     <p:sldMasterId id="2147483648" r:id="rId1"/>
   </p:sldMasterIdLst>
   <p:sldIdLst>
-    <p:sldId id="256" r:id="rId2"/>
-    <p:sldId id="268" r:id="rId3"/>
-    <p:sldId id="266" r:id="rId4"/>
-    <p:sldId id="263" r:id="rId5"/>
+    <p:sldId id="269" r:id="rId2"/>
+    <p:sldId id="270" r:id="rId3"/>
+    <p:sldId id="271" r:id="rId4"/>
+    <p:sldId id="272" r:id="rId5"/>
   </p:sldIdLst>
   <p:sldSz cx="12192000" cy="6858000"/>
   <p:notesSz cx="6858000" cy="9144000"/>
@@ -3293,49 +3293,6 @@
           <a:chExt cx="0" cy="0"/>
         </a:xfrm>
       </p:grpSpPr>
-      <p:cxnSp>
-        <p:nvCxnSpPr>
-          <p:cNvPr id="6" name="직선 연결선 5">
-            <a:extLst>
-              <a:ext uri="{FF2B5EF4-FFF2-40B4-BE49-F238E27FC236}">
-                <a16:creationId xmlns:a16="http://schemas.microsoft.com/office/drawing/2014/main" id="{43A4FB8F-BACC-4713-87B3-DED36C01DB8F}"/>
-              </a:ext>
-            </a:extLst>
-          </p:cNvPr>
-          <p:cNvCxnSpPr>
-            <a:cxnSpLocks/>
-          </p:cNvCxnSpPr>
-          <p:nvPr/>
-        </p:nvCxnSpPr>
-        <p:spPr>
-          <a:xfrm>
-            <a:off x="906185" y="854306"/>
-            <a:ext cx="567592" cy="0"/>
-          </a:xfrm>
-          <a:prstGeom prst="line">
-            <a:avLst/>
-          </a:prstGeom>
-          <a:ln w="38100">
-            <a:solidFill>
-              <a:schemeClr val="tx1"/>
-            </a:solidFill>
-          </a:ln>
-        </p:spPr>
-        <p:style>
-          <a:lnRef idx="1">
-            <a:schemeClr val="accent1"/>
-          </a:lnRef>
-          <a:fillRef idx="0">
-            <a:schemeClr val="accent1"/>
-          </a:fillRef>
-          <a:effectRef idx="0">
-            <a:schemeClr val="accent1"/>
-          </a:effectRef>
-          <a:fontRef idx="minor">
-            <a:schemeClr val="tx1"/>
-          </a:fontRef>
-        </p:style>
-      </p:cxnSp>
       <p:sp>
         <p:nvSpPr>
           <p:cNvPr id="9" name="제목 1">
@@ -3352,7 +3309,7 @@
         </p:nvSpPr>
         <p:spPr>
           <a:xfrm>
-            <a:off x="3596343" y="3369341"/>
+            <a:off x="3596342" y="3429000"/>
             <a:ext cx="4999315" cy="413931"/>
           </a:xfrm>
           <a:prstGeom prst="rect">
@@ -3416,7 +3373,7 @@
         </p:nvSpPr>
         <p:spPr>
           <a:xfrm>
-            <a:off x="4938058" y="4834293"/>
+            <a:off x="4205142" y="4890134"/>
             <a:ext cx="3924300" cy="413931"/>
           </a:xfrm>
           <a:prstGeom prst="rect">
@@ -3447,42 +3404,43 @@
             </a:lvl1pPr>
           </a:lstStyle>
           <a:p>
-            <a:r>
-              <a:rPr lang="ko-KR" altLang="en-US" sz="1400" dirty="0">
+            <a:pPr algn="ctr"/>
+            <a:r>
+              <a:rPr lang="ko-KR" altLang="en-US" sz="1600" dirty="0">
                 <a:latin typeface="a시월구일1" panose="02020600000000000000" pitchFamily="18" charset="-127"/>
                 <a:ea typeface="a시월구일1" panose="02020600000000000000" pitchFamily="18" charset="-127"/>
               </a:rPr>
               <a:t>생성형 </a:t>
             </a:r>
             <a:r>
-              <a:rPr lang="en-US" altLang="ko-KR" sz="1400" dirty="0">
+              <a:rPr lang="en-US" altLang="ko-KR" sz="1600" dirty="0">
                 <a:latin typeface="a시월구일1" panose="02020600000000000000" pitchFamily="18" charset="-127"/>
                 <a:ea typeface="a시월구일1" panose="02020600000000000000" pitchFamily="18" charset="-127"/>
               </a:rPr>
               <a:t>AI </a:t>
             </a:r>
             <a:r>
-              <a:rPr lang="ko-KR" altLang="en-US" sz="1400" dirty="0">
+              <a:rPr lang="ko-KR" altLang="en-US" sz="1600" dirty="0">
                 <a:latin typeface="a시월구일1" panose="02020600000000000000" pitchFamily="18" charset="-127"/>
                 <a:ea typeface="a시월구일1" panose="02020600000000000000" pitchFamily="18" charset="-127"/>
               </a:rPr>
               <a:t>개발자 양성과정 </a:t>
             </a:r>
             <a:r>
-              <a:rPr lang="en-US" altLang="ko-KR" sz="1400" dirty="0">
+              <a:rPr lang="en-US" altLang="ko-KR" sz="1600" dirty="0">
                 <a:latin typeface="a시월구일1" panose="02020600000000000000" pitchFamily="18" charset="-127"/>
                 <a:ea typeface="a시월구일1" panose="02020600000000000000" pitchFamily="18" charset="-127"/>
               </a:rPr>
               <a:t>| </a:t>
             </a:r>
             <a:r>
-              <a:rPr lang="ko-KR" altLang="en-US" sz="1400" dirty="0" err="1">
+              <a:rPr lang="ko-KR" altLang="en-US" sz="1600" dirty="0" err="1">
                 <a:latin typeface="a시월구일1" panose="02020600000000000000" pitchFamily="18" charset="-127"/>
                 <a:ea typeface="a시월구일1" panose="02020600000000000000" pitchFamily="18" charset="-127"/>
               </a:rPr>
               <a:t>진성욱</a:t>
             </a:r>
-            <a:endParaRPr lang="ko-KR" altLang="en-US" sz="1400" dirty="0">
+            <a:endParaRPr lang="ko-KR" altLang="en-US" sz="1600" dirty="0">
               <a:latin typeface="a시월구일1" panose="02020600000000000000" pitchFamily="18" charset="-127"/>
               <a:ea typeface="a시월구일1" panose="02020600000000000000" pitchFamily="18" charset="-127"/>
             </a:endParaRPr>
@@ -3551,10 +3509,72 @@
           </a:p>
         </p:txBody>
       </p:sp>
+      <p:sp>
+        <p:nvSpPr>
+          <p:cNvPr id="3" name="제목 1">
+            <a:extLst>
+              <a:ext uri="{FF2B5EF4-FFF2-40B4-BE49-F238E27FC236}">
+                <a16:creationId xmlns:a16="http://schemas.microsoft.com/office/drawing/2014/main" id="{F9EBE895-42F4-09C4-9D7A-062FBA1DE154}"/>
+              </a:ext>
+            </a:extLst>
+          </p:cNvPr>
+          <p:cNvSpPr txBox="1">
+            <a:spLocks/>
+          </p:cNvSpPr>
+          <p:nvPr/>
+        </p:nvSpPr>
+        <p:spPr>
+          <a:xfrm>
+            <a:off x="4205142" y="4476203"/>
+            <a:ext cx="3924300" cy="413931"/>
+          </a:xfrm>
+          <a:prstGeom prst="rect">
+            <a:avLst/>
+          </a:prstGeom>
+        </p:spPr>
+        <p:txBody>
+          <a:bodyPr vert="horz" lIns="91440" tIns="45720" rIns="91440" bIns="45720" rtlCol="0" anchor="ctr">
+            <a:normAutofit/>
+          </a:bodyPr>
+          <a:lstStyle>
+            <a:lvl1pPr algn="l" defTabSz="914400" rtl="0" eaLnBrk="1" latinLnBrk="1" hangingPunct="1">
+              <a:lnSpc>
+                <a:spcPct val="90000"/>
+              </a:lnSpc>
+              <a:spcBef>
+                <a:spcPct val="0"/>
+              </a:spcBef>
+              <a:buNone/>
+              <a:defRPr sz="4400" kern="1200">
+                <a:solidFill>
+                  <a:schemeClr val="tx1"/>
+                </a:solidFill>
+                <a:latin typeface="+mj-lt"/>
+                <a:ea typeface="+mj-ea"/>
+                <a:cs typeface="+mj-cs"/>
+              </a:defRPr>
+            </a:lvl1pPr>
+          </a:lstStyle>
+          <a:p>
+            <a:pPr algn="ctr"/>
+            <a:r>
+              <a:rPr lang="en-US" altLang="ko-KR" sz="1600" b="1" dirty="0">
+                <a:latin typeface="a시월구일1" panose="02020600000000000000" pitchFamily="18" charset="-127"/>
+                <a:ea typeface="a시월구일1" panose="02020600000000000000" pitchFamily="18" charset="-127"/>
+              </a:rPr>
+              <a:t>2026.03.19</a:t>
+            </a:r>
+            <a:endParaRPr lang="ko-KR" altLang="en-US" sz="1600" b="1" dirty="0">
+              <a:latin typeface="a시월구일1" panose="02020600000000000000" pitchFamily="18" charset="-127"/>
+              <a:ea typeface="a시월구일1" panose="02020600000000000000" pitchFamily="18" charset="-127"/>
+            </a:endParaRPr>
+          </a:p>
+        </p:txBody>
+      </p:sp>
     </p:spTree>
     <p:extLst>
       <p:ext uri="{BB962C8B-B14F-4D97-AF65-F5344CB8AC3E}">
-        <p14:creationId xmlns:p14="http://schemas.microsoft.com/office/powerpoint/2010/main" val="687017097"/>
+        <p14:creationId xmlns:p14="http://schemas.microsoft.com/office/powerpoint/2010/main" val="1799935995"/>
       </p:ext>
     </p:extLst>
   </p:cSld>
@@ -4184,7 +4204,7 @@
     </p:spTree>
     <p:extLst>
       <p:ext uri="{BB962C8B-B14F-4D97-AF65-F5344CB8AC3E}">
-        <p14:creationId xmlns:p14="http://schemas.microsoft.com/office/powerpoint/2010/main" val="3788828910"/>
+        <p14:creationId xmlns:p14="http://schemas.microsoft.com/office/powerpoint/2010/main" val="355658873"/>
       </p:ext>
     </p:extLst>
   </p:cSld>
@@ -4754,7 +4774,7 @@
                     <a:ea typeface="a시월구일1" panose="02020600000000000000" pitchFamily="18" charset="-127"/>
                     <a:cs typeface="Noto Sans Disp ExtBd" panose="020B0902040504020204" pitchFamily="34"/>
                   </a:rPr>
-                  <a:t>인구 데이터 결함</a:t>
+                  <a:t>인구 데이터 결합</a:t>
                 </a:r>
                 <a:endParaRPr lang="en-US" altLang="ko-KR" sz="1600" dirty="0">
                   <a:latin typeface="a시월구일1" panose="02020600000000000000" pitchFamily="18" charset="-127"/>
@@ -5325,7 +5345,7 @@
     </p:spTree>
     <p:extLst>
       <p:ext uri="{BB962C8B-B14F-4D97-AF65-F5344CB8AC3E}">
-        <p14:creationId xmlns:p14="http://schemas.microsoft.com/office/powerpoint/2010/main" val="2286479333"/>
+        <p14:creationId xmlns:p14="http://schemas.microsoft.com/office/powerpoint/2010/main" val="3721834973"/>
       </p:ext>
     </p:extLst>
   </p:cSld>
@@ -5372,7 +5392,7 @@
         </p:nvSpPr>
         <p:spPr>
           <a:xfrm>
-            <a:off x="516749" y="379988"/>
+            <a:off x="509769" y="411763"/>
             <a:ext cx="1671933" cy="489365"/>
           </a:xfrm>
           <a:prstGeom prst="rect">
@@ -5415,12 +5435,173 @@
           </a:p>
         </p:txBody>
       </p:sp>
+      <p:sp>
+        <p:nvSpPr>
+          <p:cNvPr id="39" name="TextBox 38">
+            <a:extLst>
+              <a:ext uri="{FF2B5EF4-FFF2-40B4-BE49-F238E27FC236}">
+                <a16:creationId xmlns:a16="http://schemas.microsoft.com/office/drawing/2014/main" id="{520B2A62-ABC5-C062-1DE5-7021749E2F18}"/>
+              </a:ext>
+            </a:extLst>
+          </p:cNvPr>
+          <p:cNvSpPr txBox="1"/>
+          <p:nvPr/>
+        </p:nvSpPr>
+        <p:spPr>
+          <a:xfrm>
+            <a:off x="7391982" y="3219560"/>
+            <a:ext cx="4731659" cy="961802"/>
+          </a:xfrm>
+          <a:prstGeom prst="rect">
+            <a:avLst/>
+          </a:prstGeom>
+          <a:noFill/>
+        </p:spPr>
+        <p:txBody>
+          <a:bodyPr wrap="square">
+            <a:spAutoFit/>
+          </a:bodyPr>
+          <a:lstStyle/>
+          <a:p>
+            <a:pPr algn="ctr">
+              <a:lnSpc>
+                <a:spcPct val="150000"/>
+              </a:lnSpc>
+            </a:pPr>
+            <a:r>
+              <a:rPr lang="ko-KR" altLang="en-US" dirty="0">
+                <a:latin typeface="a시월구일4" panose="02020600000000000000" pitchFamily="18" charset="-127"/>
+                <a:ea typeface="a시월구일4" panose="02020600000000000000" pitchFamily="18" charset="-127"/>
+              </a:rPr>
+              <a:t>자치구별</a:t>
+            </a:r>
+            <a:r>
+              <a:rPr lang="ko-KR" altLang="en-US" sz="2000" dirty="0">
+                <a:latin typeface="a시월구일4" panose="02020600000000000000" pitchFamily="18" charset="-127"/>
+                <a:ea typeface="a시월구일4" panose="02020600000000000000" pitchFamily="18" charset="-127"/>
+              </a:rPr>
+              <a:t> </a:t>
+            </a:r>
+            <a:r>
+              <a:rPr lang="ko-KR" altLang="en-US" sz="2000" dirty="0">
+                <a:solidFill>
+                  <a:srgbClr val="0070C0"/>
+                </a:solidFill>
+                <a:latin typeface="a시월구일4" panose="02020600000000000000" pitchFamily="18" charset="-127"/>
+                <a:ea typeface="a시월구일4" panose="02020600000000000000" pitchFamily="18" charset="-127"/>
+              </a:rPr>
+              <a:t>보건 취약 유형을 도출</a:t>
+            </a:r>
+            <a:r>
+              <a:rPr lang="ko-KR" altLang="en-US" dirty="0">
+                <a:latin typeface="a시월구일1" panose="02020600000000000000" pitchFamily="18" charset="-127"/>
+                <a:ea typeface="a시월구일1" panose="02020600000000000000" pitchFamily="18" charset="-127"/>
+              </a:rPr>
+              <a:t>하고</a:t>
+            </a:r>
+            <a:r>
+              <a:rPr lang="en-US" altLang="ko-KR" dirty="0">
+                <a:latin typeface="a시월구일1" panose="02020600000000000000" pitchFamily="18" charset="-127"/>
+                <a:ea typeface="a시월구일1" panose="02020600000000000000" pitchFamily="18" charset="-127"/>
+              </a:rPr>
+              <a:t>,</a:t>
+            </a:r>
+          </a:p>
+          <a:p>
+            <a:pPr algn="ctr">
+              <a:lnSpc>
+                <a:spcPct val="150000"/>
+              </a:lnSpc>
+            </a:pPr>
+            <a:r>
+              <a:rPr lang="ko-KR" altLang="en-US" sz="2000" dirty="0">
+                <a:solidFill>
+                  <a:srgbClr val="0070C0"/>
+                </a:solidFill>
+                <a:latin typeface="a시월구일4" panose="02020600000000000000" pitchFamily="18" charset="-127"/>
+                <a:ea typeface="a시월구일4" panose="02020600000000000000" pitchFamily="18" charset="-127"/>
+              </a:rPr>
+              <a:t>정책 의사결정을 지원</a:t>
+            </a:r>
+            <a:r>
+              <a:rPr lang="ko-KR" altLang="en-US" dirty="0">
+                <a:solidFill>
+                  <a:srgbClr val="0070C0"/>
+                </a:solidFill>
+                <a:latin typeface="a시월구일4" panose="02020600000000000000" pitchFamily="18" charset="-127"/>
+                <a:ea typeface="a시월구일4" panose="02020600000000000000" pitchFamily="18" charset="-127"/>
+              </a:rPr>
+              <a:t>하는 시스템을 </a:t>
+            </a:r>
+            <a:r>
+              <a:rPr lang="ko-KR" altLang="en-US" sz="2000" dirty="0">
+                <a:solidFill>
+                  <a:srgbClr val="0070C0"/>
+                </a:solidFill>
+                <a:latin typeface="a시월구일4" panose="02020600000000000000" pitchFamily="18" charset="-127"/>
+                <a:ea typeface="a시월구일4" panose="02020600000000000000" pitchFamily="18" charset="-127"/>
+              </a:rPr>
+              <a:t>개발</a:t>
+            </a:r>
+            <a:endParaRPr lang="ko-KR" altLang="en-US" dirty="0">
+              <a:solidFill>
+                <a:srgbClr val="0070C0"/>
+              </a:solidFill>
+              <a:latin typeface="a시월구일4" panose="02020600000000000000" pitchFamily="18" charset="-127"/>
+              <a:ea typeface="a시월구일4" panose="02020600000000000000" pitchFamily="18" charset="-127"/>
+            </a:endParaRPr>
+          </a:p>
+        </p:txBody>
+      </p:sp>
+      <p:pic>
+        <p:nvPicPr>
+          <p:cNvPr id="19" name="그림 18">
+            <a:extLst>
+              <a:ext uri="{FF2B5EF4-FFF2-40B4-BE49-F238E27FC236}">
+                <a16:creationId xmlns:a16="http://schemas.microsoft.com/office/drawing/2014/main" id="{7EA68E1C-9E6C-C8E2-FDDA-E5A564AFECBF}"/>
+              </a:ext>
+            </a:extLst>
+          </p:cNvPr>
+          <p:cNvPicPr>
+            <a:picLocks noChangeAspect="1"/>
+          </p:cNvPicPr>
+          <p:nvPr/>
+        </p:nvPicPr>
+        <p:blipFill>
+          <a:blip r:embed="rId2">
+            <a:duotone>
+              <a:schemeClr val="accent2">
+                <a:shade val="45000"/>
+                <a:satMod val="135000"/>
+              </a:schemeClr>
+              <a:prstClr val="white"/>
+            </a:duotone>
+            <a:extLst>
+              <a:ext uri="{28A0092B-C50C-407E-A947-70E740481C1C}">
+                <a14:useLocalDpi xmlns:a14="http://schemas.microsoft.com/office/drawing/2010/main" val="0"/>
+              </a:ext>
+            </a:extLst>
+          </a:blip>
+          <a:stretch>
+            <a:fillRect/>
+          </a:stretch>
+        </p:blipFill>
+        <p:spPr>
+          <a:xfrm rot="5400000">
+            <a:off x="4503141" y="3012257"/>
+            <a:ext cx="4336782" cy="1643401"/>
+          </a:xfrm>
+          <a:prstGeom prst="rect">
+            <a:avLst/>
+          </a:prstGeom>
+        </p:spPr>
+      </p:pic>
       <p:grpSp>
         <p:nvGrpSpPr>
-          <p:cNvPr id="17" name="그룹 16">
-            <a:extLst>
-              <a:ext uri="{FF2B5EF4-FFF2-40B4-BE49-F238E27FC236}">
-                <a16:creationId xmlns:a16="http://schemas.microsoft.com/office/drawing/2014/main" id="{B73155E1-F75B-214C-C215-ABFD571A48C7}"/>
+          <p:cNvPr id="13" name="그룹 12">
+            <a:extLst>
+              <a:ext uri="{FF2B5EF4-FFF2-40B4-BE49-F238E27FC236}">
+                <a16:creationId xmlns:a16="http://schemas.microsoft.com/office/drawing/2014/main" id="{7295F48A-07CA-1DD8-058D-31359C4008DD}"/>
               </a:ext>
             </a:extLst>
           </p:cNvPr>
@@ -5429,18 +5610,18 @@
         </p:nvGrpSpPr>
         <p:grpSpPr>
           <a:xfrm>
-            <a:off x="665666" y="1201724"/>
-            <a:ext cx="8876919" cy="1396375"/>
-            <a:chOff x="665666" y="1201724"/>
-            <a:chExt cx="8876919" cy="1396375"/>
+            <a:off x="227984" y="1300025"/>
+            <a:ext cx="6321157" cy="1371582"/>
+            <a:chOff x="137242" y="1222829"/>
+            <a:chExt cx="6321157" cy="1371582"/>
           </a:xfrm>
         </p:grpSpPr>
         <p:sp>
           <p:nvSpPr>
-            <p:cNvPr id="41" name="사각형: 둥근 모서리 40">
+            <p:cNvPr id="3" name="사각형: 둥근 모서리 2">
               <a:extLst>
                 <a:ext uri="{FF2B5EF4-FFF2-40B4-BE49-F238E27FC236}">
-                  <a16:creationId xmlns:a16="http://schemas.microsoft.com/office/drawing/2014/main" id="{D4065A8B-CC79-C0CA-3E90-0F624C509FC9}"/>
+                  <a16:creationId xmlns:a16="http://schemas.microsoft.com/office/drawing/2014/main" id="{FF12169B-7F53-5127-DAA9-F3A5635A213B}"/>
                 </a:ext>
               </a:extLst>
             </p:cNvPr>
@@ -5449,12 +5630,12 @@
           </p:nvSpPr>
           <p:spPr>
             <a:xfrm>
-              <a:off x="1304072" y="1315299"/>
-              <a:ext cx="8238513" cy="1182916"/>
+              <a:off x="137242" y="1411495"/>
+              <a:ext cx="6321157" cy="1182916"/>
             </a:xfrm>
             <a:prstGeom prst="roundRect">
               <a:avLst>
-                <a:gd name="adj" fmla="val 24847"/>
+                <a:gd name="adj" fmla="val 0"/>
               </a:avLst>
             </a:prstGeom>
             <a:solidFill>
@@ -5495,10 +5676,219 @@
         </p:sp>
         <p:sp>
           <p:nvSpPr>
-            <p:cNvPr id="2" name="타원 1">
+            <p:cNvPr id="27" name="TextBox 26">
               <a:extLst>
                 <a:ext uri="{FF2B5EF4-FFF2-40B4-BE49-F238E27FC236}">
-                  <a16:creationId xmlns:a16="http://schemas.microsoft.com/office/drawing/2014/main" id="{C391245F-ED1D-F4DE-6948-0B249C4DB286}"/>
+                  <a16:creationId xmlns:a16="http://schemas.microsoft.com/office/drawing/2014/main" id="{63224FB8-B737-D457-16C7-5E3F5EA31015}"/>
+                </a:ext>
+              </a:extLst>
+            </p:cNvPr>
+            <p:cNvSpPr txBox="1"/>
+            <p:nvPr/>
+          </p:nvSpPr>
+          <p:spPr>
+            <a:xfrm>
+              <a:off x="259635" y="1714024"/>
+              <a:ext cx="5841145" cy="533223"/>
+            </a:xfrm>
+            <a:prstGeom prst="rect">
+              <a:avLst/>
+            </a:prstGeom>
+            <a:noFill/>
+          </p:spPr>
+          <p:txBody>
+            <a:bodyPr wrap="square" lIns="0" tIns="0" rIns="0" bIns="0" rtlCol="0" anchor="t">
+              <a:spAutoFit/>
+            </a:bodyPr>
+            <a:lstStyle/>
+            <a:p>
+              <a:pPr marL="85725" indent="-85725" latinLnBrk="0">
+                <a:lnSpc>
+                  <a:spcPct val="130000"/>
+                </a:lnSpc>
+                <a:buFont typeface="Arial" panose="020B0604020202020204" pitchFamily="34" charset="0"/>
+                <a:buChar char="•"/>
+              </a:pPr>
+              <a:r>
+                <a:rPr kumimoji="1" lang="en-US" altLang="ko-KR" sz="1400" dirty="0">
+                  <a:ln w="12700">
+                    <a:solidFill>
+                      <a:schemeClr val="tx1">
+                        <a:alpha val="5000"/>
+                      </a:schemeClr>
+                    </a:solidFill>
+                  </a:ln>
+                  <a:solidFill>
+                    <a:schemeClr val="tx1">
+                      <a:lumMod val="85000"/>
+                      <a:lumOff val="15000"/>
+                    </a:schemeClr>
+                  </a:solidFill>
+                  <a:latin typeface="a시월구일3" panose="02020600000000000000" pitchFamily="18" charset="-127"/>
+                  <a:ea typeface="a시월구일3" panose="02020600000000000000" pitchFamily="18" charset="-127"/>
+                  <a:cs typeface="Pretendard" panose="02000503000000020004" pitchFamily="2" charset="-127"/>
+                </a:rPr>
+                <a:t>K-Means </a:t>
+              </a:r>
+              <a:r>
+                <a:rPr kumimoji="1" lang="ko-KR" altLang="en-US" sz="1400" dirty="0">
+                  <a:ln w="12700">
+                    <a:solidFill>
+                      <a:schemeClr val="tx1">
+                        <a:alpha val="5000"/>
+                      </a:schemeClr>
+                    </a:solidFill>
+                  </a:ln>
+                  <a:solidFill>
+                    <a:schemeClr val="tx1">
+                      <a:lumMod val="85000"/>
+                      <a:lumOff val="15000"/>
+                    </a:schemeClr>
+                  </a:solidFill>
+                  <a:latin typeface="a시월구일3" panose="02020600000000000000" pitchFamily="18" charset="-127"/>
+                  <a:ea typeface="a시월구일3" panose="02020600000000000000" pitchFamily="18" charset="-127"/>
+                  <a:cs typeface="Pretendard" panose="02000503000000020004" pitchFamily="2" charset="-127"/>
+                </a:rPr>
+                <a:t>군집화를 적용</a:t>
+              </a:r>
+              <a:r>
+                <a:rPr kumimoji="1" lang="ko-KR" altLang="en-US" sz="1400" dirty="0">
+                  <a:ln w="12700">
+                    <a:solidFill>
+                      <a:schemeClr val="tx1">
+                        <a:alpha val="5000"/>
+                      </a:schemeClr>
+                    </a:solidFill>
+                  </a:ln>
+                  <a:solidFill>
+                    <a:schemeClr val="tx1">
+                      <a:lumMod val="85000"/>
+                      <a:lumOff val="15000"/>
+                    </a:schemeClr>
+                  </a:solidFill>
+                  <a:latin typeface="a시월구일1" panose="02020600000000000000" pitchFamily="18" charset="-127"/>
+                  <a:ea typeface="a시월구일1" panose="02020600000000000000" pitchFamily="18" charset="-127"/>
+                  <a:cs typeface="Pretendard" panose="02000503000000020004" pitchFamily="2" charset="-127"/>
+                </a:rPr>
+                <a:t>하여 자치구별 보건 취약 유형을 분류</a:t>
+              </a:r>
+              <a:endParaRPr kumimoji="1" lang="en-US" altLang="ko-KR" sz="1400" dirty="0">
+                <a:ln w="12700">
+                  <a:solidFill>
+                    <a:schemeClr val="tx1">
+                      <a:alpha val="5000"/>
+                    </a:schemeClr>
+                  </a:solidFill>
+                </a:ln>
+                <a:solidFill>
+                  <a:schemeClr val="tx1">
+                    <a:lumMod val="85000"/>
+                    <a:lumOff val="15000"/>
+                  </a:schemeClr>
+                </a:solidFill>
+                <a:latin typeface="a시월구일1" panose="02020600000000000000" pitchFamily="18" charset="-127"/>
+                <a:ea typeface="a시월구일1" panose="02020600000000000000" pitchFamily="18" charset="-127"/>
+                <a:cs typeface="Pretendard" panose="02000503000000020004" pitchFamily="2" charset="-127"/>
+              </a:endParaRPr>
+            </a:p>
+            <a:p>
+              <a:pPr marL="85725" indent="-85725" latinLnBrk="0">
+                <a:lnSpc>
+                  <a:spcPct val="130000"/>
+                </a:lnSpc>
+                <a:buFont typeface="Arial" panose="020B0604020202020204" pitchFamily="34" charset="0"/>
+                <a:buChar char="•"/>
+              </a:pPr>
+              <a:r>
+                <a:rPr kumimoji="1" lang="en-US" altLang="ko-KR" sz="1400" dirty="0">
+                  <a:ln w="12700">
+                    <a:solidFill>
+                      <a:schemeClr val="tx1">
+                        <a:alpha val="5000"/>
+                      </a:schemeClr>
+                    </a:solidFill>
+                  </a:ln>
+                  <a:solidFill>
+                    <a:schemeClr val="tx1">
+                      <a:lumMod val="85000"/>
+                      <a:lumOff val="15000"/>
+                    </a:schemeClr>
+                  </a:solidFill>
+                  <a:latin typeface="a시월구일3" panose="02020600000000000000" pitchFamily="18" charset="-127"/>
+                  <a:ea typeface="a시월구일3" panose="02020600000000000000" pitchFamily="18" charset="-127"/>
+                  <a:cs typeface="Pretendard" panose="02000503000000020004" pitchFamily="2" charset="-127"/>
+                </a:rPr>
+                <a:t>SHAP</a:t>
+              </a:r>
+              <a:r>
+                <a:rPr kumimoji="1" lang="ko-KR" altLang="en-US" sz="1400" dirty="0">
+                  <a:ln w="12700">
+                    <a:solidFill>
+                      <a:schemeClr val="tx1">
+                        <a:alpha val="5000"/>
+                      </a:schemeClr>
+                    </a:solidFill>
+                  </a:ln>
+                  <a:solidFill>
+                    <a:schemeClr val="tx1">
+                      <a:lumMod val="85000"/>
+                      <a:lumOff val="15000"/>
+                    </a:schemeClr>
+                  </a:solidFill>
+                  <a:latin typeface="a시월구일3" panose="02020600000000000000" pitchFamily="18" charset="-127"/>
+                  <a:ea typeface="a시월구일3" panose="02020600000000000000" pitchFamily="18" charset="-127"/>
+                  <a:cs typeface="Pretendard" panose="02000503000000020004" pitchFamily="2" charset="-127"/>
+                </a:rPr>
+                <a:t>을 활용</a:t>
+              </a:r>
+              <a:r>
+                <a:rPr kumimoji="1" lang="ko-KR" altLang="en-US" sz="1400" dirty="0">
+                  <a:ln w="12700">
+                    <a:solidFill>
+                      <a:schemeClr val="tx1">
+                        <a:alpha val="5000"/>
+                      </a:schemeClr>
+                    </a:solidFill>
+                  </a:ln>
+                  <a:solidFill>
+                    <a:schemeClr val="tx1">
+                      <a:lumMod val="85000"/>
+                      <a:lumOff val="15000"/>
+                    </a:schemeClr>
+                  </a:solidFill>
+                  <a:latin typeface="a시월구일1" panose="02020600000000000000" pitchFamily="18" charset="-127"/>
+                  <a:ea typeface="a시월구일1" panose="02020600000000000000" pitchFamily="18" charset="-127"/>
+                  <a:cs typeface="Pretendard" panose="02000503000000020004" pitchFamily="2" charset="-127"/>
+                </a:rPr>
+                <a:t>하여 유형 분류 결과에 대한 영향 요인 분석</a:t>
+              </a:r>
+              <a:endParaRPr kumimoji="1" lang="en-US" altLang="ko-KR" sz="1400" dirty="0">
+                <a:ln w="12700">
+                  <a:solidFill>
+                    <a:schemeClr val="tx1">
+                      <a:alpha val="5000"/>
+                    </a:schemeClr>
+                  </a:solidFill>
+                </a:ln>
+                <a:solidFill>
+                  <a:schemeClr val="tx1">
+                    <a:lumMod val="85000"/>
+                    <a:lumOff val="15000"/>
+                  </a:schemeClr>
+                </a:solidFill>
+                <a:latin typeface="a시월구일1" panose="02020600000000000000" pitchFamily="18" charset="-127"/>
+                <a:ea typeface="a시월구일1" panose="02020600000000000000" pitchFamily="18" charset="-127"/>
+                <a:cs typeface="Pretendard" panose="02000503000000020004" pitchFamily="2" charset="-127"/>
+              </a:endParaRPr>
+            </a:p>
+          </p:txBody>
+        </p:sp>
+        <p:sp>
+          <p:nvSpPr>
+            <p:cNvPr id="5" name="사각형: 둥근 모서리 4">
+              <a:extLst>
+                <a:ext uri="{FF2B5EF4-FFF2-40B4-BE49-F238E27FC236}">
+                  <a16:creationId xmlns:a16="http://schemas.microsoft.com/office/drawing/2014/main" id="{A7A43165-4AC0-1264-B7B0-456BDA4F308F}"/>
                 </a:ext>
               </a:extLst>
             </p:cNvPr>
@@ -5507,18 +5897,24 @@
           </p:nvSpPr>
           <p:spPr>
             <a:xfrm>
-              <a:off x="665666" y="1201724"/>
-              <a:ext cx="1494000" cy="1396375"/>
+              <a:off x="137243" y="1222829"/>
+              <a:ext cx="1643400" cy="377331"/>
             </a:xfrm>
-            <a:prstGeom prst="ellipse">
-              <a:avLst/>
+            <a:prstGeom prst="roundRect">
+              <a:avLst>
+                <a:gd name="adj" fmla="val 16564"/>
+              </a:avLst>
             </a:prstGeom>
             <a:solidFill>
-              <a:schemeClr val="bg1"/>
+              <a:schemeClr val="bg1">
+                <a:lumMod val="95000"/>
+              </a:schemeClr>
             </a:solidFill>
             <a:ln>
               <a:solidFill>
-                <a:schemeClr val="tx1"/>
+                <a:schemeClr val="bg2">
+                  <a:lumMod val="90000"/>
+                </a:schemeClr>
               </a:solidFill>
             </a:ln>
           </p:spPr>
@@ -5552,7 +5948,7 @@
                   <a:ea typeface="a시월구일3" panose="02020600000000000000" pitchFamily="18" charset="-127"/>
                   <a:cs typeface="Noto Sans Disp ExtBd" panose="020B0902040504020204" pitchFamily="34"/>
                 </a:rPr>
-                <a:t>Data</a:t>
+                <a:t>AI Model</a:t>
               </a:r>
               <a:endParaRPr lang="ko-KR" altLang="en-US" sz="2000" dirty="0">
                 <a:solidFill>
@@ -5568,10 +5964,10 @@
       </p:grpSp>
       <p:grpSp>
         <p:nvGrpSpPr>
-          <p:cNvPr id="21" name="그룹 20">
-            <a:extLst>
-              <a:ext uri="{FF2B5EF4-FFF2-40B4-BE49-F238E27FC236}">
-                <a16:creationId xmlns:a16="http://schemas.microsoft.com/office/drawing/2014/main" id="{45B6B3B3-5477-A4A3-188A-8F612C173EDA}"/>
+          <p:cNvPr id="15" name="그룹 14">
+            <a:extLst>
+              <a:ext uri="{FF2B5EF4-FFF2-40B4-BE49-F238E27FC236}">
+                <a16:creationId xmlns:a16="http://schemas.microsoft.com/office/drawing/2014/main" id="{4B13B8AA-D53F-3B2A-6E36-1334BD0756FC}"/>
               </a:ext>
             </a:extLst>
           </p:cNvPr>
@@ -5580,18 +5976,18 @@
         </p:nvGrpSpPr>
         <p:grpSpPr>
           <a:xfrm>
-            <a:off x="2062042" y="2551201"/>
-            <a:ext cx="8904298" cy="1396375"/>
-            <a:chOff x="2062042" y="2671883"/>
-            <a:chExt cx="8904298" cy="1396375"/>
+            <a:off x="227984" y="2841042"/>
+            <a:ext cx="6443549" cy="1422441"/>
+            <a:chOff x="137242" y="2859223"/>
+            <a:chExt cx="6443549" cy="1422441"/>
           </a:xfrm>
         </p:grpSpPr>
         <p:sp>
           <p:nvSpPr>
-            <p:cNvPr id="3" name="사각형: 둥근 모서리 2">
+            <p:cNvPr id="12" name="사각형: 둥근 모서리 11">
               <a:extLst>
                 <a:ext uri="{FF2B5EF4-FFF2-40B4-BE49-F238E27FC236}">
-                  <a16:creationId xmlns:a16="http://schemas.microsoft.com/office/drawing/2014/main" id="{FF12169B-7F53-5127-DAA9-F3A5635A213B}"/>
+                  <a16:creationId xmlns:a16="http://schemas.microsoft.com/office/drawing/2014/main" id="{26C86896-F921-C8BF-AF42-56188E4468A0}"/>
                 </a:ext>
               </a:extLst>
             </p:cNvPr>
@@ -5600,12 +5996,12 @@
           </p:nvSpPr>
           <p:spPr>
             <a:xfrm>
-              <a:off x="2062042" y="2785458"/>
-              <a:ext cx="8240400" cy="1182916"/>
+              <a:off x="137242" y="3098748"/>
+              <a:ext cx="6321157" cy="1182916"/>
             </a:xfrm>
             <a:prstGeom prst="roundRect">
               <a:avLst>
-                <a:gd name="adj" fmla="val 16564"/>
+                <a:gd name="adj" fmla="val 0"/>
               </a:avLst>
             </a:prstGeom>
             <a:solidFill>
@@ -5646,10 +6042,10 @@
         </p:sp>
         <p:sp>
           <p:nvSpPr>
-            <p:cNvPr id="4" name="타원 3">
+            <p:cNvPr id="9" name="사각형: 둥근 모서리 8">
               <a:extLst>
                 <a:ext uri="{FF2B5EF4-FFF2-40B4-BE49-F238E27FC236}">
-                  <a16:creationId xmlns:a16="http://schemas.microsoft.com/office/drawing/2014/main" id="{EA0FCFF6-6ADF-83B8-2EBA-2F51F9E457C9}"/>
+                  <a16:creationId xmlns:a16="http://schemas.microsoft.com/office/drawing/2014/main" id="{AEAEB14B-B945-8535-1500-54E5E9827A23}"/>
                 </a:ext>
               </a:extLst>
             </p:cNvPr>
@@ -5658,175 +6054,24 @@
           </p:nvSpPr>
           <p:spPr>
             <a:xfrm>
-              <a:off x="9472340" y="2671883"/>
-              <a:ext cx="1494000" cy="1396375"/>
-            </a:xfrm>
-            <a:prstGeom prst="ellipse">
-              <a:avLst/>
-            </a:prstGeom>
-            <a:solidFill>
-              <a:schemeClr val="bg1"/>
-            </a:solidFill>
-            <a:ln>
-              <a:solidFill>
-                <a:schemeClr val="tx1"/>
-              </a:solidFill>
-            </a:ln>
-          </p:spPr>
-          <p:style>
-            <a:lnRef idx="2">
-              <a:schemeClr val="accent1">
-                <a:shade val="15000"/>
-              </a:schemeClr>
-            </a:lnRef>
-            <a:fillRef idx="1">
-              <a:schemeClr val="accent1"/>
-            </a:fillRef>
-            <a:effectRef idx="0">
-              <a:schemeClr val="accent1"/>
-            </a:effectRef>
-            <a:fontRef idx="minor">
-              <a:schemeClr val="lt1"/>
-            </a:fontRef>
-          </p:style>
-          <p:txBody>
-            <a:bodyPr rtlCol="0" anchor="ctr"/>
-            <a:lstStyle/>
-            <a:p>
-              <a:pPr algn="ctr"/>
-              <a:r>
-                <a:rPr lang="en-US" altLang="ko-KR" sz="2000" dirty="0">
-                  <a:solidFill>
-                    <a:schemeClr val="tx1"/>
-                  </a:solidFill>
-                  <a:latin typeface="a시월구일3" panose="02020600000000000000" pitchFamily="18" charset="-127"/>
-                  <a:ea typeface="a시월구일3" panose="02020600000000000000" pitchFamily="18" charset="-127"/>
-                  <a:cs typeface="Noto Sans Disp ExtBd" panose="020B0902040504020204" pitchFamily="34"/>
-                </a:rPr>
-                <a:t>AI</a:t>
-              </a:r>
-            </a:p>
-            <a:p>
-              <a:pPr algn="ctr"/>
-              <a:r>
-                <a:rPr lang="en-US" altLang="ko-KR" sz="2000" dirty="0">
-                  <a:solidFill>
-                    <a:schemeClr val="tx1"/>
-                  </a:solidFill>
-                  <a:latin typeface="a시월구일3" panose="02020600000000000000" pitchFamily="18" charset="-127"/>
-                  <a:ea typeface="a시월구일3" panose="02020600000000000000" pitchFamily="18" charset="-127"/>
-                  <a:cs typeface="Noto Sans Disp ExtBd" panose="020B0902040504020204" pitchFamily="34"/>
-                </a:rPr>
-                <a:t>Model</a:t>
-              </a:r>
-            </a:p>
-          </p:txBody>
-        </p:sp>
-      </p:grpSp>
-      <p:grpSp>
-        <p:nvGrpSpPr>
-          <p:cNvPr id="22" name="그룹 21">
-            <a:extLst>
-              <a:ext uri="{FF2B5EF4-FFF2-40B4-BE49-F238E27FC236}">
-                <a16:creationId xmlns:a16="http://schemas.microsoft.com/office/drawing/2014/main" id="{2373ABF3-31C5-71A3-5140-03C9E3AD6E2F}"/>
-              </a:ext>
-            </a:extLst>
-          </p:cNvPr>
-          <p:cNvGrpSpPr/>
-          <p:nvPr/>
-        </p:nvGrpSpPr>
-        <p:grpSpPr>
-          <a:xfrm>
-            <a:off x="568715" y="3900678"/>
-            <a:ext cx="8973870" cy="1396375"/>
-            <a:chOff x="568715" y="4209095"/>
-            <a:chExt cx="8973870" cy="1396375"/>
-          </a:xfrm>
-        </p:grpSpPr>
-        <p:sp>
-          <p:nvSpPr>
-            <p:cNvPr id="7" name="사각형: 둥근 모서리 6">
-              <a:extLst>
-                <a:ext uri="{FF2B5EF4-FFF2-40B4-BE49-F238E27FC236}">
-                  <a16:creationId xmlns:a16="http://schemas.microsoft.com/office/drawing/2014/main" id="{58554317-C382-D1F2-0F40-44CC0071AD24}"/>
-                </a:ext>
-              </a:extLst>
-            </p:cNvPr>
-            <p:cNvSpPr/>
-            <p:nvPr/>
-          </p:nvSpPr>
-          <p:spPr>
-            <a:xfrm>
-              <a:off x="1304072" y="4322670"/>
-              <a:ext cx="8238513" cy="1182916"/>
+              <a:off x="137243" y="2859223"/>
+              <a:ext cx="1643400" cy="377331"/>
             </a:xfrm>
             <a:prstGeom prst="roundRect">
               <a:avLst>
-                <a:gd name="adj" fmla="val 24847"/>
+                <a:gd name="adj" fmla="val 16564"/>
               </a:avLst>
             </a:prstGeom>
             <a:solidFill>
-              <a:schemeClr val="bg1"/>
+              <a:schemeClr val="bg1">
+                <a:lumMod val="95000"/>
+              </a:schemeClr>
             </a:solidFill>
             <a:ln>
               <a:solidFill>
                 <a:schemeClr val="bg2">
                   <a:lumMod val="90000"/>
                 </a:schemeClr>
-              </a:solidFill>
-            </a:ln>
-          </p:spPr>
-          <p:style>
-            <a:lnRef idx="2">
-              <a:schemeClr val="accent1">
-                <a:shade val="15000"/>
-              </a:schemeClr>
-            </a:lnRef>
-            <a:fillRef idx="1">
-              <a:schemeClr val="accent1"/>
-            </a:fillRef>
-            <a:effectRef idx="0">
-              <a:schemeClr val="accent1"/>
-            </a:effectRef>
-            <a:fontRef idx="minor">
-              <a:schemeClr val="lt1"/>
-            </a:fontRef>
-          </p:style>
-          <p:txBody>
-            <a:bodyPr rtlCol="0" anchor="ctr"/>
-            <a:lstStyle/>
-            <a:p>
-              <a:pPr algn="ctr"/>
-              <a:endParaRPr lang="ko-KR" altLang="en-US" dirty="0"/>
-            </a:p>
-          </p:txBody>
-        </p:sp>
-        <p:sp>
-          <p:nvSpPr>
-            <p:cNvPr id="8" name="타원 7">
-              <a:extLst>
-                <a:ext uri="{FF2B5EF4-FFF2-40B4-BE49-F238E27FC236}">
-                  <a16:creationId xmlns:a16="http://schemas.microsoft.com/office/drawing/2014/main" id="{F5BA7D0C-FD06-7D9B-0C8B-5FA3DC04F5C0}"/>
-                </a:ext>
-              </a:extLst>
-            </p:cNvPr>
-            <p:cNvSpPr/>
-            <p:nvPr/>
-          </p:nvSpPr>
-          <p:spPr>
-            <a:xfrm>
-              <a:off x="568715" y="4209095"/>
-              <a:ext cx="1493327" cy="1396375"/>
-            </a:xfrm>
-            <a:prstGeom prst="ellipse">
-              <a:avLst/>
-            </a:prstGeom>
-            <a:solidFill>
-              <a:schemeClr val="bg1"/>
-            </a:solidFill>
-            <a:ln>
-              <a:solidFill>
-                <a:schemeClr val="tx1"/>
               </a:solidFill>
             </a:ln>
           </p:spPr>
@@ -5873,13 +6118,222 @@
             </a:p>
           </p:txBody>
         </p:sp>
+        <p:sp>
+          <p:nvSpPr>
+            <p:cNvPr id="28" name="TextBox 27">
+              <a:extLst>
+                <a:ext uri="{FF2B5EF4-FFF2-40B4-BE49-F238E27FC236}">
+                  <a16:creationId xmlns:a16="http://schemas.microsoft.com/office/drawing/2014/main" id="{AA880690-1BC0-75FB-D97C-DC20EAD83AB4}"/>
+                </a:ext>
+              </a:extLst>
+            </p:cNvPr>
+            <p:cNvSpPr txBox="1"/>
+            <p:nvPr/>
+          </p:nvSpPr>
+          <p:spPr>
+            <a:xfrm>
+              <a:off x="259635" y="3385892"/>
+              <a:ext cx="6321156" cy="608628"/>
+            </a:xfrm>
+            <a:prstGeom prst="rect">
+              <a:avLst/>
+            </a:prstGeom>
+            <a:noFill/>
+          </p:spPr>
+          <p:txBody>
+            <a:bodyPr wrap="square" lIns="0" tIns="0" rIns="0" bIns="0" rtlCol="0" anchor="t">
+              <a:spAutoFit/>
+            </a:bodyPr>
+            <a:lstStyle/>
+            <a:p>
+              <a:pPr marL="85725" indent="-85725" latinLnBrk="0">
+                <a:lnSpc>
+                  <a:spcPct val="150000"/>
+                </a:lnSpc>
+                <a:buFont typeface="Arial" panose="020B0604020202020204" pitchFamily="34" charset="0"/>
+                <a:buChar char="•"/>
+              </a:pPr>
+              <a:r>
+                <a:rPr kumimoji="1" lang="ko-KR" altLang="en-US" sz="1400" dirty="0">
+                  <a:ln w="12700">
+                    <a:solidFill>
+                      <a:schemeClr val="tx1">
+                        <a:alpha val="5000"/>
+                      </a:schemeClr>
+                    </a:solidFill>
+                  </a:ln>
+                  <a:solidFill>
+                    <a:schemeClr val="tx1">
+                      <a:lumMod val="85000"/>
+                      <a:lumOff val="15000"/>
+                    </a:schemeClr>
+                  </a:solidFill>
+                  <a:latin typeface="a시월구일1" panose="02020600000000000000" pitchFamily="18" charset="-127"/>
+                  <a:ea typeface="a시월구일1" panose="02020600000000000000" pitchFamily="18" charset="-127"/>
+                  <a:cs typeface="Pretendard" panose="02000503000000020004" pitchFamily="2" charset="-127"/>
+                </a:rPr>
+                <a:t>자치구별 보건 </a:t>
+              </a:r>
+              <a:r>
+                <a:rPr kumimoji="1" lang="ko-KR" altLang="en-US" sz="1400" dirty="0">
+                  <a:ln w="12700">
+                    <a:solidFill>
+                      <a:schemeClr val="tx1">
+                        <a:alpha val="5000"/>
+                      </a:schemeClr>
+                    </a:solidFill>
+                  </a:ln>
+                  <a:solidFill>
+                    <a:schemeClr val="tx1">
+                      <a:lumMod val="85000"/>
+                      <a:lumOff val="15000"/>
+                    </a:schemeClr>
+                  </a:solidFill>
+                  <a:latin typeface="a시월구일3" panose="02020600000000000000" pitchFamily="18" charset="-127"/>
+                  <a:ea typeface="a시월구일3" panose="02020600000000000000" pitchFamily="18" charset="-127"/>
+                  <a:cs typeface="Pretendard" panose="02000503000000020004" pitchFamily="2" charset="-127"/>
+                </a:rPr>
+                <a:t>취약 유형 및 위험도를 직관적으로 확인</a:t>
+              </a:r>
+              <a:r>
+                <a:rPr kumimoji="1" lang="ko-KR" altLang="en-US" sz="1400" dirty="0">
+                  <a:ln w="12700">
+                    <a:solidFill>
+                      <a:schemeClr val="tx1">
+                        <a:alpha val="5000"/>
+                      </a:schemeClr>
+                    </a:solidFill>
+                  </a:ln>
+                  <a:solidFill>
+                    <a:schemeClr val="tx1">
+                      <a:lumMod val="85000"/>
+                      <a:lumOff val="15000"/>
+                    </a:schemeClr>
+                  </a:solidFill>
+                  <a:latin typeface="a시월구일1" panose="02020600000000000000" pitchFamily="18" charset="-127"/>
+                  <a:ea typeface="a시월구일1" panose="02020600000000000000" pitchFamily="18" charset="-127"/>
+                  <a:cs typeface="Pretendard" panose="02000503000000020004" pitchFamily="2" charset="-127"/>
+                </a:rPr>
+                <a:t>할 수 있는 시각화 제공</a:t>
+              </a:r>
+              <a:endParaRPr kumimoji="1" lang="en-US" altLang="ko-KR" sz="1400" dirty="0">
+                <a:ln w="12700">
+                  <a:solidFill>
+                    <a:schemeClr val="tx1">
+                      <a:alpha val="5000"/>
+                    </a:schemeClr>
+                  </a:solidFill>
+                </a:ln>
+                <a:solidFill>
+                  <a:schemeClr val="tx1">
+                    <a:lumMod val="85000"/>
+                    <a:lumOff val="15000"/>
+                  </a:schemeClr>
+                </a:solidFill>
+                <a:latin typeface="a시월구일1" panose="02020600000000000000" pitchFamily="18" charset="-127"/>
+                <a:ea typeface="a시월구일1" panose="02020600000000000000" pitchFamily="18" charset="-127"/>
+                <a:cs typeface="Pretendard" panose="02000503000000020004" pitchFamily="2" charset="-127"/>
+              </a:endParaRPr>
+            </a:p>
+            <a:p>
+              <a:pPr marL="85725" indent="-85725" latinLnBrk="0">
+                <a:lnSpc>
+                  <a:spcPct val="150000"/>
+                </a:lnSpc>
+                <a:buFont typeface="Arial" panose="020B0604020202020204" pitchFamily="34" charset="0"/>
+                <a:buChar char="•"/>
+              </a:pPr>
+              <a:r>
+                <a:rPr kumimoji="1" lang="ko-KR" altLang="en-US" sz="1400" dirty="0">
+                  <a:ln w="12700">
+                    <a:solidFill>
+                      <a:schemeClr val="tx1">
+                        <a:alpha val="5000"/>
+                      </a:schemeClr>
+                    </a:solidFill>
+                  </a:ln>
+                  <a:solidFill>
+                    <a:schemeClr val="tx1">
+                      <a:lumMod val="85000"/>
+                      <a:lumOff val="15000"/>
+                    </a:schemeClr>
+                  </a:solidFill>
+                  <a:latin typeface="a시월구일1" panose="02020600000000000000" pitchFamily="18" charset="-127"/>
+                  <a:ea typeface="a시월구일1" panose="02020600000000000000" pitchFamily="18" charset="-127"/>
+                  <a:cs typeface="Pretendard" panose="02000503000000020004" pitchFamily="2" charset="-127"/>
+                </a:rPr>
+                <a:t>지역별 상세 분석 및 원인 정보를 사용자가 쉽게 탐색할 수 있는 </a:t>
+              </a:r>
+              <a:r>
+                <a:rPr kumimoji="1" lang="en-US" altLang="ko-KR" sz="1400" dirty="0">
+                  <a:ln w="12700">
+                    <a:solidFill>
+                      <a:schemeClr val="tx1">
+                        <a:alpha val="5000"/>
+                      </a:schemeClr>
+                    </a:solidFill>
+                  </a:ln>
+                  <a:solidFill>
+                    <a:schemeClr val="tx1">
+                      <a:lumMod val="85000"/>
+                      <a:lumOff val="15000"/>
+                    </a:schemeClr>
+                  </a:solidFill>
+                  <a:latin typeface="a시월구일1" panose="02020600000000000000" pitchFamily="18" charset="-127"/>
+                  <a:ea typeface="a시월구일1" panose="02020600000000000000" pitchFamily="18" charset="-127"/>
+                  <a:cs typeface="Pretendard" panose="02000503000000020004" pitchFamily="2" charset="-127"/>
+                </a:rPr>
+                <a:t>UI </a:t>
+              </a:r>
+              <a:r>
+                <a:rPr kumimoji="1" lang="ko-KR" altLang="en-US" sz="1400" dirty="0">
+                  <a:ln w="12700">
+                    <a:solidFill>
+                      <a:schemeClr val="tx1">
+                        <a:alpha val="5000"/>
+                      </a:schemeClr>
+                    </a:solidFill>
+                  </a:ln>
+                  <a:solidFill>
+                    <a:schemeClr val="tx1">
+                      <a:lumMod val="85000"/>
+                      <a:lumOff val="15000"/>
+                    </a:schemeClr>
+                  </a:solidFill>
+                  <a:latin typeface="a시월구일1" panose="02020600000000000000" pitchFamily="18" charset="-127"/>
+                  <a:ea typeface="a시월구일1" panose="02020600000000000000" pitchFamily="18" charset="-127"/>
+                  <a:cs typeface="Pretendard" panose="02000503000000020004" pitchFamily="2" charset="-127"/>
+                </a:rPr>
+                <a:t>구성</a:t>
+              </a:r>
+              <a:endParaRPr kumimoji="1" lang="en-US" altLang="ko-KR" sz="1400" dirty="0">
+                <a:ln w="12700">
+                  <a:solidFill>
+                    <a:schemeClr val="tx1">
+                      <a:alpha val="5000"/>
+                    </a:schemeClr>
+                  </a:solidFill>
+                </a:ln>
+                <a:solidFill>
+                  <a:schemeClr val="tx1">
+                    <a:lumMod val="85000"/>
+                    <a:lumOff val="15000"/>
+                  </a:schemeClr>
+                </a:solidFill>
+                <a:latin typeface="a시월구일1" panose="02020600000000000000" pitchFamily="18" charset="-127"/>
+                <a:ea typeface="a시월구일1" panose="02020600000000000000" pitchFamily="18" charset="-127"/>
+                <a:cs typeface="Pretendard" panose="02000503000000020004" pitchFamily="2" charset="-127"/>
+              </a:endParaRPr>
+            </a:p>
+          </p:txBody>
+        </p:sp>
       </p:grpSp>
       <p:grpSp>
         <p:nvGrpSpPr>
-          <p:cNvPr id="23" name="그룹 22">
-            <a:extLst>
-              <a:ext uri="{FF2B5EF4-FFF2-40B4-BE49-F238E27FC236}">
-                <a16:creationId xmlns:a16="http://schemas.microsoft.com/office/drawing/2014/main" id="{F7226973-1CA5-49A7-7AA5-D91D4F9D44EA}"/>
+          <p:cNvPr id="18" name="그룹 17">
+            <a:extLst>
+              <a:ext uri="{FF2B5EF4-FFF2-40B4-BE49-F238E27FC236}">
+                <a16:creationId xmlns:a16="http://schemas.microsoft.com/office/drawing/2014/main" id="{A633CE7A-B7E1-8551-30E0-3E51F6EE17A5}"/>
               </a:ext>
             </a:extLst>
           </p:cNvPr>
@@ -5888,18 +6342,18 @@
         </p:nvGrpSpPr>
         <p:grpSpPr>
           <a:xfrm>
-            <a:off x="2814461" y="5250156"/>
-            <a:ext cx="8914310" cy="1396375"/>
-            <a:chOff x="2814461" y="5679254"/>
-            <a:chExt cx="8914310" cy="1396375"/>
+            <a:off x="227984" y="4630766"/>
+            <a:ext cx="6443550" cy="1371582"/>
+            <a:chOff x="137242" y="4728398"/>
+            <a:chExt cx="6443550" cy="1371582"/>
           </a:xfrm>
         </p:grpSpPr>
         <p:sp>
           <p:nvSpPr>
-            <p:cNvPr id="14" name="사각형: 둥근 모서리 13">
+            <p:cNvPr id="10" name="사각형: 둥근 모서리 9">
               <a:extLst>
                 <a:ext uri="{FF2B5EF4-FFF2-40B4-BE49-F238E27FC236}">
-                  <a16:creationId xmlns:a16="http://schemas.microsoft.com/office/drawing/2014/main" id="{2B1B83E6-7BD0-5AC0-3A07-D35056DF0DD2}"/>
+                  <a16:creationId xmlns:a16="http://schemas.microsoft.com/office/drawing/2014/main" id="{DF39ADD6-B53C-92EB-752D-7252146F63ED}"/>
                 </a:ext>
               </a:extLst>
             </p:cNvPr>
@@ -5908,12 +6362,12 @@
           </p:nvSpPr>
           <p:spPr>
             <a:xfrm>
-              <a:off x="2814461" y="5798779"/>
-              <a:ext cx="8240400" cy="1182916"/>
+              <a:off x="137242" y="4917064"/>
+              <a:ext cx="6321157" cy="1182916"/>
             </a:xfrm>
             <a:prstGeom prst="roundRect">
               <a:avLst>
-                <a:gd name="adj" fmla="val 16564"/>
+                <a:gd name="adj" fmla="val 0"/>
               </a:avLst>
             </a:prstGeom>
             <a:solidFill>
@@ -5954,10 +6408,10 @@
         </p:sp>
         <p:sp>
           <p:nvSpPr>
-            <p:cNvPr id="16" name="타원 15">
+            <p:cNvPr id="11" name="사각형: 둥근 모서리 10">
               <a:extLst>
                 <a:ext uri="{FF2B5EF4-FFF2-40B4-BE49-F238E27FC236}">
-                  <a16:creationId xmlns:a16="http://schemas.microsoft.com/office/drawing/2014/main" id="{3D4A798E-7B28-D756-BB58-94B5B2D8DF7D}"/>
+                  <a16:creationId xmlns:a16="http://schemas.microsoft.com/office/drawing/2014/main" id="{F6DB9FE3-1C9C-DCCB-88F9-E27ED60C28D6}"/>
                 </a:ext>
               </a:extLst>
             </p:cNvPr>
@@ -5966,18 +6420,24 @@
           </p:nvSpPr>
           <p:spPr>
             <a:xfrm>
-              <a:off x="10234771" y="5679254"/>
-              <a:ext cx="1494000" cy="1396375"/>
+              <a:off x="137243" y="4728398"/>
+              <a:ext cx="1643400" cy="377331"/>
             </a:xfrm>
-            <a:prstGeom prst="ellipse">
-              <a:avLst/>
+            <a:prstGeom prst="roundRect">
+              <a:avLst>
+                <a:gd name="adj" fmla="val 16564"/>
+              </a:avLst>
             </a:prstGeom>
             <a:solidFill>
-              <a:schemeClr val="bg1"/>
+              <a:schemeClr val="bg1">
+                <a:lumMod val="95000"/>
+              </a:schemeClr>
             </a:solidFill>
             <a:ln>
               <a:solidFill>
-                <a:schemeClr val="tx1"/>
+                <a:schemeClr val="bg2">
+                  <a:lumMod val="90000"/>
+                </a:schemeClr>
               </a:solidFill>
             </a:ln>
           </p:spPr>
@@ -6003,7 +6463,7 @@
             <a:p>
               <a:pPr algn="ctr"/>
               <a:r>
-                <a:rPr lang="ko-KR" altLang="en-US" sz="2000" dirty="0">
+                <a:rPr lang="en-US" altLang="ko-KR" sz="2000" dirty="0">
                   <a:solidFill>
                     <a:schemeClr val="tx1"/>
                   </a:solidFill>
@@ -6011,49 +6471,76 @@
                   <a:ea typeface="a시월구일3" panose="02020600000000000000" pitchFamily="18" charset="-127"/>
                   <a:cs typeface="Noto Sans Disp ExtBd" panose="020B0902040504020204" pitchFamily="34"/>
                 </a:rPr>
-                <a:t>서비스</a:t>
+                <a:t>Service</a:t>
               </a:r>
+              <a:endParaRPr lang="ko-KR" altLang="en-US" sz="2000" dirty="0">
+                <a:solidFill>
+                  <a:schemeClr val="tx1"/>
+                </a:solidFill>
+                <a:latin typeface="a시월구일3" panose="02020600000000000000" pitchFamily="18" charset="-127"/>
+                <a:ea typeface="a시월구일3" panose="02020600000000000000" pitchFamily="18" charset="-127"/>
+                <a:cs typeface="Noto Sans Disp ExtBd" panose="020B0902040504020204" pitchFamily="34"/>
+              </a:endParaRPr>
             </a:p>
           </p:txBody>
         </p:sp>
-      </p:grpSp>
-      <p:sp>
-        <p:nvSpPr>
-          <p:cNvPr id="36" name="TextBox 35">
-            <a:extLst>
-              <a:ext uri="{FF2B5EF4-FFF2-40B4-BE49-F238E27FC236}">
-                <a16:creationId xmlns:a16="http://schemas.microsoft.com/office/drawing/2014/main" id="{41FC2CE6-0C48-AA3D-4ACC-D73CC76E3FEB}"/>
-              </a:ext>
-            </a:extLst>
-          </p:cNvPr>
-          <p:cNvSpPr txBox="1"/>
-          <p:nvPr/>
-        </p:nvSpPr>
-        <p:spPr>
-          <a:xfrm>
-            <a:off x="2297713" y="1558969"/>
-            <a:ext cx="7244869" cy="695575"/>
-          </a:xfrm>
-          <a:prstGeom prst="rect">
-            <a:avLst/>
-          </a:prstGeom>
-          <a:noFill/>
-        </p:spPr>
-        <p:txBody>
-          <a:bodyPr wrap="square" lIns="0" tIns="0" rIns="0" bIns="0" rtlCol="0" anchor="t">
-            <a:spAutoFit/>
-          </a:bodyPr>
-          <a:lstStyle/>
-          <a:p>
-            <a:pPr marL="182563" indent="-182563" latinLnBrk="0">
-              <a:lnSpc>
-                <a:spcPct val="150000"/>
-              </a:lnSpc>
-              <a:buFont typeface="Arial" panose="020B0604020202020204" pitchFamily="34" charset="0"/>
-              <a:buChar char="•"/>
-            </a:pPr>
-            <a:r>
-              <a:rPr kumimoji="1" lang="ko-KR" altLang="en-US" sz="1600" dirty="0">
+        <p:sp>
+          <p:nvSpPr>
+            <p:cNvPr id="30" name="TextBox 29">
+              <a:extLst>
+                <a:ext uri="{FF2B5EF4-FFF2-40B4-BE49-F238E27FC236}">
+                  <a16:creationId xmlns:a16="http://schemas.microsoft.com/office/drawing/2014/main" id="{E992E3DE-9EFD-8C27-6FB7-FFA999B81E34}"/>
+                </a:ext>
+              </a:extLst>
+            </p:cNvPr>
+            <p:cNvSpPr txBox="1"/>
+            <p:nvPr/>
+          </p:nvSpPr>
+          <p:spPr>
+            <a:xfrm>
+              <a:off x="259635" y="5248149"/>
+              <a:ext cx="6321157" cy="608628"/>
+            </a:xfrm>
+            <a:prstGeom prst="rect">
+              <a:avLst/>
+            </a:prstGeom>
+            <a:noFill/>
+          </p:spPr>
+          <p:txBody>
+            <a:bodyPr wrap="square" lIns="0" tIns="0" rIns="0" bIns="0" rtlCol="0" anchor="t">
+              <a:spAutoFit/>
+            </a:bodyPr>
+            <a:lstStyle/>
+            <a:p>
+              <a:pPr marL="85725" indent="-85725" latinLnBrk="0">
+                <a:lnSpc>
+                  <a:spcPct val="150000"/>
+                </a:lnSpc>
+                <a:buFont typeface="Arial" panose="020B0604020202020204" pitchFamily="34" charset="0"/>
+                <a:buChar char="•"/>
+              </a:pPr>
+              <a:r>
+                <a:rPr kumimoji="1" lang="ko-KR" altLang="en-US" sz="1400" dirty="0">
+                  <a:ln w="12700">
+                    <a:solidFill>
+                      <a:schemeClr val="tx1">
+                        <a:alpha val="5000"/>
+                      </a:schemeClr>
+                    </a:solidFill>
+                  </a:ln>
+                  <a:solidFill>
+                    <a:schemeClr val="tx1">
+                      <a:lumMod val="85000"/>
+                      <a:lumOff val="15000"/>
+                    </a:schemeClr>
+                  </a:solidFill>
+                  <a:latin typeface="a시월구일1" panose="02020600000000000000" pitchFamily="18" charset="-127"/>
+                  <a:ea typeface="a시월구일1" panose="02020600000000000000" pitchFamily="18" charset="-127"/>
+                  <a:cs typeface="Pretendard" panose="02000503000000020004" pitchFamily="2" charset="-127"/>
+                </a:rPr>
+                <a:t>분석 결과를 기반으로  자치구별 보건 정책 의사결정을 지원하는 시스템 구현</a:t>
+              </a:r>
+              <a:endParaRPr kumimoji="1" lang="en-US" altLang="ko-KR" sz="1400" dirty="0">
                 <a:ln w="12700">
                   <a:solidFill>
                     <a:schemeClr val="tx1">
@@ -6070,11 +6557,38 @@
                 <a:latin typeface="a시월구일1" panose="02020600000000000000" pitchFamily="18" charset="-127"/>
                 <a:ea typeface="a시월구일1" panose="02020600000000000000" pitchFamily="18" charset="-127"/>
                 <a:cs typeface="Pretendard" panose="02000503000000020004" pitchFamily="2" charset="-127"/>
-              </a:rPr>
-              <a:t>환경</a:t>
-            </a:r>
-            <a:r>
-              <a:rPr kumimoji="1" lang="en-US" altLang="ko-KR" sz="1600" dirty="0">
+              </a:endParaRPr>
+            </a:p>
+            <a:p>
+              <a:pPr marL="85725" indent="-85725" latinLnBrk="0">
+                <a:lnSpc>
+                  <a:spcPct val="150000"/>
+                </a:lnSpc>
+                <a:buFont typeface="Arial" panose="020B0604020202020204" pitchFamily="34" charset="0"/>
+                <a:buChar char="•"/>
+              </a:pPr>
+              <a:r>
+                <a:rPr kumimoji="1" lang="ko-KR" altLang="en-US" sz="1400" dirty="0">
+                  <a:ln w="12700">
+                    <a:solidFill>
+                      <a:schemeClr val="tx1">
+                        <a:alpha val="5000"/>
+                      </a:schemeClr>
+                    </a:solidFill>
+                  </a:ln>
+                  <a:solidFill>
+                    <a:schemeClr val="tx1">
+                      <a:lumMod val="85000"/>
+                      <a:lumOff val="15000"/>
+                    </a:schemeClr>
+                  </a:solidFill>
+                  <a:latin typeface="a시월구일1" panose="02020600000000000000" pitchFamily="18" charset="-127"/>
+                  <a:ea typeface="a시월구일1" panose="02020600000000000000" pitchFamily="18" charset="-127"/>
+                  <a:cs typeface="Pretendard" panose="02000503000000020004" pitchFamily="2" charset="-127"/>
+                </a:rPr>
+                <a:t>지역 특성에 따른 맞춤형 정책 방향 제공</a:t>
+              </a:r>
+              <a:endParaRPr kumimoji="1" lang="en-US" altLang="ko-KR" sz="1400" dirty="0">
                 <a:ln w="12700">
                   <a:solidFill>
                     <a:schemeClr val="tx1">
@@ -6091,692 +6605,15 @@
                 <a:latin typeface="a시월구일1" panose="02020600000000000000" pitchFamily="18" charset="-127"/>
                 <a:ea typeface="a시월구일1" panose="02020600000000000000" pitchFamily="18" charset="-127"/>
                 <a:cs typeface="Pretendard" panose="02000503000000020004" pitchFamily="2" charset="-127"/>
-              </a:rPr>
-              <a:t>(</a:t>
-            </a:r>
-            <a:r>
-              <a:rPr kumimoji="1" lang="ko-KR" altLang="en-US" sz="1600" dirty="0">
-                <a:ln w="12700">
-                  <a:solidFill>
-                    <a:schemeClr val="tx1">
-                      <a:alpha val="5000"/>
-                    </a:schemeClr>
-                  </a:solidFill>
-                </a:ln>
-                <a:solidFill>
-                  <a:schemeClr val="tx1">
-                    <a:lumMod val="85000"/>
-                    <a:lumOff val="15000"/>
-                  </a:schemeClr>
-                </a:solidFill>
-                <a:latin typeface="a시월구일1" panose="02020600000000000000" pitchFamily="18" charset="-127"/>
-                <a:ea typeface="a시월구일1" panose="02020600000000000000" pitchFamily="18" charset="-127"/>
-                <a:cs typeface="Pretendard" panose="02000503000000020004" pitchFamily="2" charset="-127"/>
-              </a:rPr>
-              <a:t>미세먼지</a:t>
-            </a:r>
-            <a:r>
-              <a:rPr kumimoji="1" lang="en-US" altLang="ko-KR" sz="1600" dirty="0">
-                <a:ln w="12700">
-                  <a:solidFill>
-                    <a:schemeClr val="tx1">
-                      <a:alpha val="5000"/>
-                    </a:schemeClr>
-                  </a:solidFill>
-                </a:ln>
-                <a:solidFill>
-                  <a:schemeClr val="tx1">
-                    <a:lumMod val="85000"/>
-                    <a:lumOff val="15000"/>
-                  </a:schemeClr>
-                </a:solidFill>
-                <a:latin typeface="a시월구일1" panose="02020600000000000000" pitchFamily="18" charset="-127"/>
-                <a:ea typeface="a시월구일1" panose="02020600000000000000" pitchFamily="18" charset="-127"/>
-                <a:cs typeface="Pretendard" panose="02000503000000020004" pitchFamily="2" charset="-127"/>
-              </a:rPr>
-              <a:t>), </a:t>
-            </a:r>
-            <a:r>
-              <a:rPr kumimoji="1" lang="ko-KR" altLang="en-US" sz="1600" dirty="0">
-                <a:ln w="12700">
-                  <a:solidFill>
-                    <a:schemeClr val="tx1">
-                      <a:alpha val="5000"/>
-                    </a:schemeClr>
-                  </a:solidFill>
-                </a:ln>
-                <a:solidFill>
-                  <a:schemeClr val="tx1">
-                    <a:lumMod val="85000"/>
-                    <a:lumOff val="15000"/>
-                  </a:schemeClr>
-                </a:solidFill>
-                <a:latin typeface="a시월구일1" panose="02020600000000000000" pitchFamily="18" charset="-127"/>
-                <a:ea typeface="a시월구일1" panose="02020600000000000000" pitchFamily="18" charset="-127"/>
-                <a:cs typeface="Pretendard" panose="02000503000000020004" pitchFamily="2" charset="-127"/>
-              </a:rPr>
-              <a:t>보건</a:t>
-            </a:r>
-            <a:r>
-              <a:rPr kumimoji="1" lang="en-US" altLang="ko-KR" sz="1600" dirty="0">
-                <a:ln w="12700">
-                  <a:solidFill>
-                    <a:schemeClr val="tx1">
-                      <a:alpha val="5000"/>
-                    </a:schemeClr>
-                  </a:solidFill>
-                </a:ln>
-                <a:solidFill>
-                  <a:schemeClr val="tx1">
-                    <a:lumMod val="85000"/>
-                    <a:lumOff val="15000"/>
-                  </a:schemeClr>
-                </a:solidFill>
-                <a:latin typeface="a시월구일1" panose="02020600000000000000" pitchFamily="18" charset="-127"/>
-                <a:ea typeface="a시월구일1" panose="02020600000000000000" pitchFamily="18" charset="-127"/>
-                <a:cs typeface="Pretendard" panose="02000503000000020004" pitchFamily="2" charset="-127"/>
-              </a:rPr>
-              <a:t>(</a:t>
-            </a:r>
-            <a:r>
-              <a:rPr kumimoji="1" lang="ko-KR" altLang="en-US" sz="1600" dirty="0">
-                <a:ln w="12700">
-                  <a:solidFill>
-                    <a:schemeClr val="tx1">
-                      <a:alpha val="5000"/>
-                    </a:schemeClr>
-                  </a:solidFill>
-                </a:ln>
-                <a:solidFill>
-                  <a:schemeClr val="tx1">
-                    <a:lumMod val="85000"/>
-                    <a:lumOff val="15000"/>
-                  </a:schemeClr>
-                </a:solidFill>
-                <a:latin typeface="a시월구일1" panose="02020600000000000000" pitchFamily="18" charset="-127"/>
-                <a:ea typeface="a시월구일1" panose="02020600000000000000" pitchFamily="18" charset="-127"/>
-                <a:cs typeface="Pretendard" panose="02000503000000020004" pitchFamily="2" charset="-127"/>
-              </a:rPr>
-              <a:t>진료 건수</a:t>
-            </a:r>
-            <a:r>
-              <a:rPr kumimoji="1" lang="en-US" altLang="ko-KR" sz="1600" dirty="0">
-                <a:ln w="12700">
-                  <a:solidFill>
-                    <a:schemeClr val="tx1">
-                      <a:alpha val="5000"/>
-                    </a:schemeClr>
-                  </a:solidFill>
-                </a:ln>
-                <a:solidFill>
-                  <a:schemeClr val="tx1">
-                    <a:lumMod val="85000"/>
-                    <a:lumOff val="15000"/>
-                  </a:schemeClr>
-                </a:solidFill>
-                <a:latin typeface="a시월구일1" panose="02020600000000000000" pitchFamily="18" charset="-127"/>
-                <a:ea typeface="a시월구일1" panose="02020600000000000000" pitchFamily="18" charset="-127"/>
-                <a:cs typeface="Pretendard" panose="02000503000000020004" pitchFamily="2" charset="-127"/>
-              </a:rPr>
-              <a:t>), </a:t>
-            </a:r>
-            <a:r>
-              <a:rPr kumimoji="1" lang="ko-KR" altLang="en-US" sz="1600" dirty="0">
-                <a:ln w="12700">
-                  <a:solidFill>
-                    <a:schemeClr val="tx1">
-                      <a:alpha val="5000"/>
-                    </a:schemeClr>
-                  </a:solidFill>
-                </a:ln>
-                <a:solidFill>
-                  <a:schemeClr val="tx1">
-                    <a:lumMod val="85000"/>
-                    <a:lumOff val="15000"/>
-                  </a:schemeClr>
-                </a:solidFill>
-                <a:latin typeface="a시월구일1" panose="02020600000000000000" pitchFamily="18" charset="-127"/>
-                <a:ea typeface="a시월구일1" panose="02020600000000000000" pitchFamily="18" charset="-127"/>
-                <a:cs typeface="Pretendard" panose="02000503000000020004" pitchFamily="2" charset="-127"/>
-              </a:rPr>
-              <a:t>인구 데이터를 통합하여  자치구별 분석 데이터셋 구축</a:t>
-            </a:r>
-            <a:endParaRPr kumimoji="1" lang="en-US" altLang="ko-KR" sz="1600" dirty="0">
-              <a:ln w="12700">
-                <a:solidFill>
-                  <a:schemeClr val="tx1">
-                    <a:alpha val="5000"/>
-                  </a:schemeClr>
-                </a:solidFill>
-              </a:ln>
-              <a:solidFill>
-                <a:schemeClr val="tx1">
-                  <a:lumMod val="85000"/>
-                  <a:lumOff val="15000"/>
-                </a:schemeClr>
-              </a:solidFill>
-              <a:latin typeface="a시월구일3" panose="02020600000000000000" pitchFamily="18" charset="-127"/>
-              <a:ea typeface="a시월구일3" panose="02020600000000000000" pitchFamily="18" charset="-127"/>
-              <a:cs typeface="Pretendard" panose="02000503000000020004" pitchFamily="2" charset="-127"/>
-            </a:endParaRPr>
-          </a:p>
-        </p:txBody>
-      </p:sp>
-      <p:sp>
-        <p:nvSpPr>
-          <p:cNvPr id="27" name="TextBox 26">
-            <a:extLst>
-              <a:ext uri="{FF2B5EF4-FFF2-40B4-BE49-F238E27FC236}">
-                <a16:creationId xmlns:a16="http://schemas.microsoft.com/office/drawing/2014/main" id="{63224FB8-B737-D457-16C7-5E3F5EA31015}"/>
-              </a:ext>
-            </a:extLst>
-          </p:cNvPr>
-          <p:cNvSpPr txBox="1"/>
-          <p:nvPr/>
-        </p:nvSpPr>
-        <p:spPr>
-          <a:xfrm>
-            <a:off x="2297714" y="2857958"/>
-            <a:ext cx="7022131" cy="695575"/>
-          </a:xfrm>
-          <a:prstGeom prst="rect">
-            <a:avLst/>
-          </a:prstGeom>
-          <a:noFill/>
-        </p:spPr>
-        <p:txBody>
-          <a:bodyPr wrap="square" lIns="0" tIns="0" rIns="0" bIns="0" rtlCol="0" anchor="t">
-            <a:spAutoFit/>
-          </a:bodyPr>
-          <a:lstStyle/>
-          <a:p>
-            <a:pPr marL="182563" indent="-182563" latinLnBrk="0">
-              <a:lnSpc>
-                <a:spcPct val="150000"/>
-              </a:lnSpc>
-              <a:buFont typeface="Arial" panose="020B0604020202020204" pitchFamily="34" charset="0"/>
-              <a:buChar char="•"/>
-            </a:pPr>
-            <a:r>
-              <a:rPr kumimoji="1" lang="en-US" altLang="ko-KR" sz="1600" dirty="0">
-                <a:ln w="12700">
-                  <a:solidFill>
-                    <a:schemeClr val="tx1">
-                      <a:alpha val="5000"/>
-                    </a:schemeClr>
-                  </a:solidFill>
-                </a:ln>
-                <a:solidFill>
-                  <a:schemeClr val="tx1">
-                    <a:lumMod val="85000"/>
-                    <a:lumOff val="15000"/>
-                  </a:schemeClr>
-                </a:solidFill>
-                <a:latin typeface="a시월구일1" panose="02020600000000000000" pitchFamily="18" charset="-127"/>
-                <a:ea typeface="a시월구일1" panose="02020600000000000000" pitchFamily="18" charset="-127"/>
-                <a:cs typeface="Pretendard" panose="02000503000000020004" pitchFamily="2" charset="-127"/>
-              </a:rPr>
-              <a:t>K-Means </a:t>
-            </a:r>
-            <a:r>
-              <a:rPr kumimoji="1" lang="ko-KR" altLang="en-US" sz="1600" dirty="0">
-                <a:ln w="12700">
-                  <a:solidFill>
-                    <a:schemeClr val="tx1">
-                      <a:alpha val="5000"/>
-                    </a:schemeClr>
-                  </a:solidFill>
-                </a:ln>
-                <a:solidFill>
-                  <a:schemeClr val="tx1">
-                    <a:lumMod val="85000"/>
-                    <a:lumOff val="15000"/>
-                  </a:schemeClr>
-                </a:solidFill>
-                <a:latin typeface="a시월구일1" panose="02020600000000000000" pitchFamily="18" charset="-127"/>
-                <a:ea typeface="a시월구일1" panose="02020600000000000000" pitchFamily="18" charset="-127"/>
-                <a:cs typeface="Pretendard" panose="02000503000000020004" pitchFamily="2" charset="-127"/>
-              </a:rPr>
-              <a:t>군집화를 적용하여  자치구별 보건 취약 유형을 분류</a:t>
-            </a:r>
-            <a:endParaRPr kumimoji="1" lang="en-US" altLang="ko-KR" sz="1600" dirty="0">
-              <a:ln w="12700">
-                <a:solidFill>
-                  <a:schemeClr val="tx1">
-                    <a:alpha val="5000"/>
-                  </a:schemeClr>
-                </a:solidFill>
-              </a:ln>
-              <a:solidFill>
-                <a:schemeClr val="tx1">
-                  <a:lumMod val="85000"/>
-                  <a:lumOff val="15000"/>
-                </a:schemeClr>
-              </a:solidFill>
-              <a:latin typeface="a시월구일1" panose="02020600000000000000" pitchFamily="18" charset="-127"/>
-              <a:ea typeface="a시월구일1" panose="02020600000000000000" pitchFamily="18" charset="-127"/>
-              <a:cs typeface="Pretendard" panose="02000503000000020004" pitchFamily="2" charset="-127"/>
-            </a:endParaRPr>
-          </a:p>
-          <a:p>
-            <a:pPr marL="182563" indent="-182563" latinLnBrk="0">
-              <a:lnSpc>
-                <a:spcPct val="150000"/>
-              </a:lnSpc>
-              <a:buFont typeface="Arial" panose="020B0604020202020204" pitchFamily="34" charset="0"/>
-              <a:buChar char="•"/>
-            </a:pPr>
-            <a:r>
-              <a:rPr kumimoji="1" lang="en-US" altLang="ko-KR" sz="1600" dirty="0">
-                <a:ln w="12700">
-                  <a:solidFill>
-                    <a:schemeClr val="tx1">
-                      <a:alpha val="5000"/>
-                    </a:schemeClr>
-                  </a:solidFill>
-                </a:ln>
-                <a:solidFill>
-                  <a:schemeClr val="tx1">
-                    <a:lumMod val="85000"/>
-                    <a:lumOff val="15000"/>
-                  </a:schemeClr>
-                </a:solidFill>
-                <a:latin typeface="a시월구일1" panose="02020600000000000000" pitchFamily="18" charset="-127"/>
-                <a:ea typeface="a시월구일1" panose="02020600000000000000" pitchFamily="18" charset="-127"/>
-                <a:cs typeface="Pretendard" panose="02000503000000020004" pitchFamily="2" charset="-127"/>
-              </a:rPr>
-              <a:t>SHAP</a:t>
-            </a:r>
-            <a:r>
-              <a:rPr kumimoji="1" lang="ko-KR" altLang="en-US" sz="1600" dirty="0">
-                <a:ln w="12700">
-                  <a:solidFill>
-                    <a:schemeClr val="tx1">
-                      <a:alpha val="5000"/>
-                    </a:schemeClr>
-                  </a:solidFill>
-                </a:ln>
-                <a:solidFill>
-                  <a:schemeClr val="tx1">
-                    <a:lumMod val="85000"/>
-                    <a:lumOff val="15000"/>
-                  </a:schemeClr>
-                </a:solidFill>
-                <a:latin typeface="a시월구일1" panose="02020600000000000000" pitchFamily="18" charset="-127"/>
-                <a:ea typeface="a시월구일1" panose="02020600000000000000" pitchFamily="18" charset="-127"/>
-                <a:cs typeface="Pretendard" panose="02000503000000020004" pitchFamily="2" charset="-127"/>
-              </a:rPr>
-              <a:t>을 활용하여  유형 분류 결과에 대한 영향 요인 분석</a:t>
-            </a:r>
-            <a:endParaRPr kumimoji="1" lang="en-US" altLang="ko-KR" sz="1600" dirty="0">
-              <a:ln w="12700">
-                <a:solidFill>
-                  <a:schemeClr val="tx1">
-                    <a:alpha val="5000"/>
-                  </a:schemeClr>
-                </a:solidFill>
-              </a:ln>
-              <a:solidFill>
-                <a:schemeClr val="tx1">
-                  <a:lumMod val="85000"/>
-                  <a:lumOff val="15000"/>
-                </a:schemeClr>
-              </a:solidFill>
-              <a:latin typeface="a시월구일1" panose="02020600000000000000" pitchFamily="18" charset="-127"/>
-              <a:ea typeface="a시월구일1" panose="02020600000000000000" pitchFamily="18" charset="-127"/>
-              <a:cs typeface="Pretendard" panose="02000503000000020004" pitchFamily="2" charset="-127"/>
-            </a:endParaRPr>
-          </a:p>
-        </p:txBody>
-      </p:sp>
-      <p:sp>
-        <p:nvSpPr>
-          <p:cNvPr id="28" name="TextBox 27">
-            <a:extLst>
-              <a:ext uri="{FF2B5EF4-FFF2-40B4-BE49-F238E27FC236}">
-                <a16:creationId xmlns:a16="http://schemas.microsoft.com/office/drawing/2014/main" id="{AA880690-1BC0-75FB-D97C-DC20EAD83AB4}"/>
-              </a:ext>
-            </a:extLst>
-          </p:cNvPr>
-          <p:cNvSpPr txBox="1"/>
-          <p:nvPr/>
-        </p:nvSpPr>
-        <p:spPr>
-          <a:xfrm>
-            <a:off x="2297714" y="4251077"/>
-            <a:ext cx="7244869" cy="695575"/>
-          </a:xfrm>
-          <a:prstGeom prst="rect">
-            <a:avLst/>
-          </a:prstGeom>
-          <a:noFill/>
-        </p:spPr>
-        <p:txBody>
-          <a:bodyPr wrap="square" lIns="0" tIns="0" rIns="0" bIns="0" rtlCol="0" anchor="t">
-            <a:spAutoFit/>
-          </a:bodyPr>
-          <a:lstStyle/>
-          <a:p>
-            <a:pPr marL="182563" indent="-182563" latinLnBrk="0">
-              <a:lnSpc>
-                <a:spcPct val="150000"/>
-              </a:lnSpc>
-              <a:buFont typeface="Arial" panose="020B0604020202020204" pitchFamily="34" charset="0"/>
-              <a:buChar char="•"/>
-            </a:pPr>
-            <a:r>
-              <a:rPr kumimoji="1" lang="ko-KR" altLang="en-US" sz="1600" dirty="0">
-                <a:ln w="12700">
-                  <a:solidFill>
-                    <a:schemeClr val="tx1">
-                      <a:alpha val="5000"/>
-                    </a:schemeClr>
-                  </a:solidFill>
-                </a:ln>
-                <a:solidFill>
-                  <a:schemeClr val="tx1">
-                    <a:lumMod val="85000"/>
-                    <a:lumOff val="15000"/>
-                  </a:schemeClr>
-                </a:solidFill>
-                <a:latin typeface="a시월구일1" panose="02020600000000000000" pitchFamily="18" charset="-127"/>
-                <a:ea typeface="a시월구일1" panose="02020600000000000000" pitchFamily="18" charset="-127"/>
-                <a:cs typeface="Pretendard" panose="02000503000000020004" pitchFamily="2" charset="-127"/>
-              </a:rPr>
-              <a:t>자치구별 보건 취약 유형 및 위험도를  직관적으로 확인할 수 있는 시각화 제공</a:t>
-            </a:r>
-            <a:endParaRPr kumimoji="1" lang="en-US" altLang="ko-KR" sz="1600" dirty="0">
-              <a:ln w="12700">
-                <a:solidFill>
-                  <a:schemeClr val="tx1">
-                    <a:alpha val="5000"/>
-                  </a:schemeClr>
-                </a:solidFill>
-              </a:ln>
-              <a:solidFill>
-                <a:schemeClr val="tx1">
-                  <a:lumMod val="85000"/>
-                  <a:lumOff val="15000"/>
-                </a:schemeClr>
-              </a:solidFill>
-              <a:latin typeface="a시월구일1" panose="02020600000000000000" pitchFamily="18" charset="-127"/>
-              <a:ea typeface="a시월구일1" panose="02020600000000000000" pitchFamily="18" charset="-127"/>
-              <a:cs typeface="Pretendard" panose="02000503000000020004" pitchFamily="2" charset="-127"/>
-            </a:endParaRPr>
-          </a:p>
-          <a:p>
-            <a:pPr marL="182563" indent="-182563" latinLnBrk="0">
-              <a:lnSpc>
-                <a:spcPct val="150000"/>
-              </a:lnSpc>
-              <a:buFont typeface="Arial" panose="020B0604020202020204" pitchFamily="34" charset="0"/>
-              <a:buChar char="•"/>
-            </a:pPr>
-            <a:r>
-              <a:rPr kumimoji="1" lang="ko-KR" altLang="en-US" sz="1600" dirty="0">
-                <a:ln w="12700">
-                  <a:solidFill>
-                    <a:schemeClr val="tx1">
-                      <a:alpha val="5000"/>
-                    </a:schemeClr>
-                  </a:solidFill>
-                </a:ln>
-                <a:solidFill>
-                  <a:schemeClr val="tx1">
-                    <a:lumMod val="85000"/>
-                    <a:lumOff val="15000"/>
-                  </a:schemeClr>
-                </a:solidFill>
-                <a:latin typeface="a시월구일1" panose="02020600000000000000" pitchFamily="18" charset="-127"/>
-                <a:ea typeface="a시월구일1" panose="02020600000000000000" pitchFamily="18" charset="-127"/>
-                <a:cs typeface="Pretendard" panose="02000503000000020004" pitchFamily="2" charset="-127"/>
-              </a:rPr>
-              <a:t>지역별 상세 분석 및 원인 정보를  사용자가 쉽게 탐색할 수 있는 </a:t>
-            </a:r>
-            <a:r>
-              <a:rPr kumimoji="1" lang="en-US" altLang="ko-KR" sz="1600" dirty="0">
-                <a:ln w="12700">
-                  <a:solidFill>
-                    <a:schemeClr val="tx1">
-                      <a:alpha val="5000"/>
-                    </a:schemeClr>
-                  </a:solidFill>
-                </a:ln>
-                <a:solidFill>
-                  <a:schemeClr val="tx1">
-                    <a:lumMod val="85000"/>
-                    <a:lumOff val="15000"/>
-                  </a:schemeClr>
-                </a:solidFill>
-                <a:latin typeface="a시월구일1" panose="02020600000000000000" pitchFamily="18" charset="-127"/>
-                <a:ea typeface="a시월구일1" panose="02020600000000000000" pitchFamily="18" charset="-127"/>
-                <a:cs typeface="Pretendard" panose="02000503000000020004" pitchFamily="2" charset="-127"/>
-              </a:rPr>
-              <a:t>UI </a:t>
-            </a:r>
-            <a:r>
-              <a:rPr kumimoji="1" lang="ko-KR" altLang="en-US" sz="1600" dirty="0">
-                <a:ln w="12700">
-                  <a:solidFill>
-                    <a:schemeClr val="tx1">
-                      <a:alpha val="5000"/>
-                    </a:schemeClr>
-                  </a:solidFill>
-                </a:ln>
-                <a:solidFill>
-                  <a:schemeClr val="tx1">
-                    <a:lumMod val="85000"/>
-                    <a:lumOff val="15000"/>
-                  </a:schemeClr>
-                </a:solidFill>
-                <a:latin typeface="a시월구일1" panose="02020600000000000000" pitchFamily="18" charset="-127"/>
-                <a:ea typeface="a시월구일1" panose="02020600000000000000" pitchFamily="18" charset="-127"/>
-                <a:cs typeface="Pretendard" panose="02000503000000020004" pitchFamily="2" charset="-127"/>
-              </a:rPr>
-              <a:t>구성</a:t>
-            </a:r>
-            <a:endParaRPr kumimoji="1" lang="en-US" altLang="ko-KR" sz="1600" dirty="0">
-              <a:ln w="12700">
-                <a:solidFill>
-                  <a:schemeClr val="tx1">
-                    <a:alpha val="5000"/>
-                  </a:schemeClr>
-                </a:solidFill>
-              </a:ln>
-              <a:solidFill>
-                <a:schemeClr val="tx1">
-                  <a:lumMod val="85000"/>
-                  <a:lumOff val="15000"/>
-                </a:schemeClr>
-              </a:solidFill>
-              <a:latin typeface="a시월구일1" panose="02020600000000000000" pitchFamily="18" charset="-127"/>
-              <a:ea typeface="a시월구일1" panose="02020600000000000000" pitchFamily="18" charset="-127"/>
-              <a:cs typeface="Pretendard" panose="02000503000000020004" pitchFamily="2" charset="-127"/>
-            </a:endParaRPr>
-          </a:p>
-        </p:txBody>
-      </p:sp>
-      <p:sp>
-        <p:nvSpPr>
-          <p:cNvPr id="30" name="TextBox 29">
-            <a:extLst>
-              <a:ext uri="{FF2B5EF4-FFF2-40B4-BE49-F238E27FC236}">
-                <a16:creationId xmlns:a16="http://schemas.microsoft.com/office/drawing/2014/main" id="{E992E3DE-9EFD-8C27-6FB7-FFA999B81E34}"/>
-              </a:ext>
-            </a:extLst>
-          </p:cNvPr>
-          <p:cNvSpPr txBox="1"/>
-          <p:nvPr/>
-        </p:nvSpPr>
-        <p:spPr>
-          <a:xfrm>
-            <a:off x="2989902" y="5595547"/>
-            <a:ext cx="7244869" cy="695575"/>
-          </a:xfrm>
-          <a:prstGeom prst="rect">
-            <a:avLst/>
-          </a:prstGeom>
-          <a:noFill/>
-        </p:spPr>
-        <p:txBody>
-          <a:bodyPr wrap="square" lIns="0" tIns="0" rIns="0" bIns="0" rtlCol="0" anchor="t">
-            <a:spAutoFit/>
-          </a:bodyPr>
-          <a:lstStyle/>
-          <a:p>
-            <a:pPr marL="182563" indent="-182563" latinLnBrk="0">
-              <a:lnSpc>
-                <a:spcPct val="150000"/>
-              </a:lnSpc>
-              <a:buFont typeface="Arial" panose="020B0604020202020204" pitchFamily="34" charset="0"/>
-              <a:buChar char="•"/>
-            </a:pPr>
-            <a:r>
-              <a:rPr kumimoji="1" lang="ko-KR" altLang="en-US" sz="1600" dirty="0">
-                <a:ln w="12700">
-                  <a:solidFill>
-                    <a:schemeClr val="tx1">
-                      <a:alpha val="5000"/>
-                    </a:schemeClr>
-                  </a:solidFill>
-                </a:ln>
-                <a:solidFill>
-                  <a:schemeClr val="tx1">
-                    <a:lumMod val="85000"/>
-                    <a:lumOff val="15000"/>
-                  </a:schemeClr>
-                </a:solidFill>
-                <a:latin typeface="a시월구일1" panose="02020600000000000000" pitchFamily="18" charset="-127"/>
-                <a:ea typeface="a시월구일1" panose="02020600000000000000" pitchFamily="18" charset="-127"/>
-                <a:cs typeface="Pretendard" panose="02000503000000020004" pitchFamily="2" charset="-127"/>
-              </a:rPr>
-              <a:t>분석 결과를 기반으로  자치구별 보건 정책 의사결정을 지원하는 시스템 구현</a:t>
-            </a:r>
-            <a:endParaRPr kumimoji="1" lang="en-US" altLang="ko-KR" sz="1600" dirty="0">
-              <a:ln w="12700">
-                <a:solidFill>
-                  <a:schemeClr val="tx1">
-                    <a:alpha val="5000"/>
-                  </a:schemeClr>
-                </a:solidFill>
-              </a:ln>
-              <a:solidFill>
-                <a:schemeClr val="tx1">
-                  <a:lumMod val="85000"/>
-                  <a:lumOff val="15000"/>
-                </a:schemeClr>
-              </a:solidFill>
-              <a:latin typeface="a시월구일1" panose="02020600000000000000" pitchFamily="18" charset="-127"/>
-              <a:ea typeface="a시월구일1" panose="02020600000000000000" pitchFamily="18" charset="-127"/>
-              <a:cs typeface="Pretendard" panose="02000503000000020004" pitchFamily="2" charset="-127"/>
-            </a:endParaRPr>
-          </a:p>
-          <a:p>
-            <a:pPr marL="182563" indent="-182563" latinLnBrk="0">
-              <a:lnSpc>
-                <a:spcPct val="150000"/>
-              </a:lnSpc>
-              <a:buFont typeface="Arial" panose="020B0604020202020204" pitchFamily="34" charset="0"/>
-              <a:buChar char="•"/>
-            </a:pPr>
-            <a:r>
-              <a:rPr kumimoji="1" lang="ko-KR" altLang="en-US" sz="1600" dirty="0">
-                <a:ln w="12700">
-                  <a:solidFill>
-                    <a:schemeClr val="tx1">
-                      <a:alpha val="5000"/>
-                    </a:schemeClr>
-                  </a:solidFill>
-                </a:ln>
-                <a:solidFill>
-                  <a:schemeClr val="tx1">
-                    <a:lumMod val="85000"/>
-                    <a:lumOff val="15000"/>
-                  </a:schemeClr>
-                </a:solidFill>
-                <a:latin typeface="a시월구일1" panose="02020600000000000000" pitchFamily="18" charset="-127"/>
-                <a:ea typeface="a시월구일1" panose="02020600000000000000" pitchFamily="18" charset="-127"/>
-                <a:cs typeface="Pretendard" panose="02000503000000020004" pitchFamily="2" charset="-127"/>
-              </a:rPr>
-              <a:t>지역 특성에 따른 맞춤형 정책 방향 제공</a:t>
-            </a:r>
-            <a:endParaRPr kumimoji="1" lang="en-US" altLang="ko-KR" sz="1600" dirty="0">
-              <a:ln w="12700">
-                <a:solidFill>
-                  <a:schemeClr val="tx1">
-                    <a:alpha val="5000"/>
-                  </a:schemeClr>
-                </a:solidFill>
-              </a:ln>
-              <a:solidFill>
-                <a:schemeClr val="tx1">
-                  <a:lumMod val="85000"/>
-                  <a:lumOff val="15000"/>
-                </a:schemeClr>
-              </a:solidFill>
-              <a:latin typeface="a시월구일1" panose="02020600000000000000" pitchFamily="18" charset="-127"/>
-              <a:ea typeface="a시월구일1" panose="02020600000000000000" pitchFamily="18" charset="-127"/>
-              <a:cs typeface="Pretendard" panose="02000503000000020004" pitchFamily="2" charset="-127"/>
-            </a:endParaRPr>
-          </a:p>
-        </p:txBody>
-      </p:sp>
-      <p:sp>
-        <p:nvSpPr>
-          <p:cNvPr id="39" name="TextBox 38">
-            <a:extLst>
-              <a:ext uri="{FF2B5EF4-FFF2-40B4-BE49-F238E27FC236}">
-                <a16:creationId xmlns:a16="http://schemas.microsoft.com/office/drawing/2014/main" id="{520B2A62-ABC5-C062-1DE5-7021749E2F18}"/>
-              </a:ext>
-            </a:extLst>
-          </p:cNvPr>
-          <p:cNvSpPr txBox="1"/>
-          <p:nvPr/>
-        </p:nvSpPr>
-        <p:spPr>
-          <a:xfrm>
-            <a:off x="2493079" y="684687"/>
-            <a:ext cx="8238513" cy="369332"/>
-          </a:xfrm>
-          <a:prstGeom prst="rect">
-            <a:avLst/>
-          </a:prstGeom>
-          <a:noFill/>
-        </p:spPr>
-        <p:txBody>
-          <a:bodyPr wrap="square">
-            <a:spAutoFit/>
-          </a:bodyPr>
-          <a:lstStyle/>
-          <a:p>
-            <a:r>
-              <a:rPr lang="ko-KR" altLang="en-US" dirty="0">
-                <a:latin typeface="a시월구일4" panose="02020600000000000000" pitchFamily="18" charset="-127"/>
-                <a:ea typeface="a시월구일4" panose="02020600000000000000" pitchFamily="18" charset="-127"/>
-              </a:rPr>
-              <a:t>자치구별 보건 취약 유형을 도출</a:t>
-            </a:r>
-            <a:r>
-              <a:rPr lang="ko-KR" altLang="en-US" dirty="0">
-                <a:latin typeface="a시월구일1" panose="02020600000000000000" pitchFamily="18" charset="-127"/>
-                <a:ea typeface="a시월구일1" panose="02020600000000000000" pitchFamily="18" charset="-127"/>
-              </a:rPr>
-              <a:t>하고 </a:t>
-            </a:r>
-            <a:r>
-              <a:rPr lang="ko-KR" altLang="en-US" dirty="0">
-                <a:latin typeface="a시월구일4" panose="02020600000000000000" pitchFamily="18" charset="-127"/>
-                <a:ea typeface="a시월구일4" panose="02020600000000000000" pitchFamily="18" charset="-127"/>
-              </a:rPr>
-              <a:t>정책 의사결정을 지원하는 시스템을 개발</a:t>
-            </a:r>
-          </a:p>
-        </p:txBody>
-      </p:sp>
+              </a:endParaRPr>
+            </a:p>
+          </p:txBody>
+        </p:sp>
+      </p:grpSp>
     </p:spTree>
     <p:extLst>
       <p:ext uri="{BB962C8B-B14F-4D97-AF65-F5344CB8AC3E}">
-        <p14:creationId xmlns:p14="http://schemas.microsoft.com/office/powerpoint/2010/main" val="3375138932"/>
+        <p14:creationId xmlns:p14="http://schemas.microsoft.com/office/powerpoint/2010/main" val="3767126770"/>
       </p:ext>
     </p:extLst>
   </p:cSld>
